--- a/slides/3-1_pharmacokinetics/3-1_pharmacokinetics.pptx
+++ b/slides/3-1_pharmacokinetics/3-1_pharmacokinetics.pptx
@@ -2230,7 +2230,7 @@
           <a:ln/>
         </p:spPr>
         <p:txBody>
-          <a:bodyPr wrap="square" lIns="0" tIns="0" rIns="0" bIns="0" rtlCol="0" anchor="ctr"/>
+          <a:bodyPr wrap="none" lIns="0" tIns="0" rIns="0" bIns="0" rtlCol="0" anchor="ctr"/>
           <a:lstStyle/>
           <a:p>
             <a:pPr algn="ctr" indent="0" marL="0">
@@ -2273,7 +2273,7 @@
           <a:ln/>
         </p:spPr>
         <p:txBody>
-          <a:bodyPr wrap="square" lIns="0" tIns="0" rIns="0" bIns="0" rtlCol="0" anchor="ctr"/>
+          <a:bodyPr wrap="none" lIns="0" tIns="0" rIns="0" bIns="0" rtlCol="0" anchor="ctr"/>
           <a:lstStyle/>
           <a:p>
             <a:pPr algn="ctr" indent="0" marL="0">
@@ -2316,7 +2316,7 @@
           <a:ln/>
         </p:spPr>
         <p:txBody>
-          <a:bodyPr wrap="square" lIns="0" tIns="0" rIns="0" bIns="0" rtlCol="0" anchor="ctr"/>
+          <a:bodyPr wrap="none" lIns="0" tIns="0" rIns="0" bIns="0" rtlCol="0" anchor="ctr"/>
           <a:lstStyle/>
           <a:p>
             <a:pPr algn="ctr" indent="0" marL="0">
@@ -2359,7 +2359,7 @@
           <a:ln/>
         </p:spPr>
         <p:txBody>
-          <a:bodyPr wrap="square" lIns="0" tIns="0" rIns="0" bIns="0" rtlCol="0" anchor="ctr"/>
+          <a:bodyPr wrap="none" lIns="0" tIns="0" rIns="0" bIns="0" rtlCol="0" anchor="ctr"/>
           <a:lstStyle/>
           <a:p>
             <a:pPr algn="ctr" indent="0" marL="0">
@@ -2402,7 +2402,7 @@
           <a:ln/>
         </p:spPr>
         <p:txBody>
-          <a:bodyPr wrap="square" lIns="0" tIns="0" rIns="0" bIns="0" rtlCol="0" anchor="ctr"/>
+          <a:bodyPr wrap="none" lIns="0" tIns="0" rIns="0" bIns="0" rtlCol="0" anchor="ctr"/>
           <a:lstStyle/>
           <a:p>
             <a:pPr algn="ctr" indent="0" marL="0">
@@ -2555,7 +2555,29 @@
                 <a:ea typeface="メイリオ" pitchFamily="34" charset="-122"/>
                 <a:cs typeface="メイリオ" pitchFamily="34" charset="-120"/>
               </a:rPr>
-              <a:t>効くのは効果部位の濃度。静注から効果まで数分の遅れ</a:t>
+              <a:t>効くのは</a:t>
+            </a:r>
+            <a:r>
+              <a:rPr lang="ja-JP" altLang="en-US" sz="2800" b="1" dirty="0">
+                <a:solidFill>
+                  <a:srgbClr val="D55E00"/>
+                </a:solidFill>
+                <a:latin typeface="メイリオ" pitchFamily="34" charset="0"/>
+                <a:ea typeface="メイリオ" pitchFamily="34" charset="-122"/>
+                <a:cs typeface="メイリオ" pitchFamily="34" charset="-120"/>
+              </a:rPr>
+              <a:t>効果部位</a:t>
+            </a:r>
+            <a:r>
+              <a:rPr lang="ja-JP" altLang="en-US" sz="2800" dirty="0">
+                <a:solidFill>
+                  <a:srgbClr val="262626"/>
+                </a:solidFill>
+                <a:latin typeface="メイリオ" pitchFamily="34" charset="0"/>
+                <a:ea typeface="メイリオ" pitchFamily="34" charset="-122"/>
+                <a:cs typeface="メイリオ" pitchFamily="34" charset="-120"/>
+              </a:rPr>
+              <a:t>の濃度。静注から効果まで数分の遅れ</a:t>
             </a:r>
             <a:endParaRPr lang="ja-JP" sz="2800" dirty="0"/>
           </a:p>
@@ -2576,7 +2598,29 @@
                 <a:ea typeface="メイリオ" pitchFamily="34" charset="-122"/>
                 <a:cs typeface="メイリオ" pitchFamily="34" charset="-120"/>
               </a:rPr>
-              <a:t>単回静注は主に再分布で切れ、繰り返すと蓄積する</a:t>
+              <a:t>単回静注は主に</a:t>
+            </a:r>
+            <a:r>
+              <a:rPr lang="ja-JP" altLang="en-US" sz="2800" b="1" dirty="0">
+                <a:solidFill>
+                  <a:srgbClr val="D55E00"/>
+                </a:solidFill>
+                <a:latin typeface="メイリオ" pitchFamily="34" charset="0"/>
+                <a:ea typeface="メイリオ" pitchFamily="34" charset="-122"/>
+                <a:cs typeface="メイリオ" pitchFamily="34" charset="-120"/>
+              </a:rPr>
+              <a:t>再分布</a:t>
+            </a:r>
+            <a:r>
+              <a:rPr lang="ja-JP" altLang="en-US" sz="2800" dirty="0">
+                <a:solidFill>
+                  <a:srgbClr val="262626"/>
+                </a:solidFill>
+                <a:latin typeface="メイリオ" pitchFamily="34" charset="0"/>
+                <a:ea typeface="メイリオ" pitchFamily="34" charset="-122"/>
+                <a:cs typeface="メイリオ" pitchFamily="34" charset="-120"/>
+              </a:rPr>
+              <a:t>で切れ、繰り返すと蓄積する</a:t>
             </a:r>
             <a:endParaRPr lang="ja-JP" sz="2800" dirty="0"/>
           </a:p>
@@ -2597,7 +2641,29 @@
                 <a:ea typeface="メイリオ" pitchFamily="34" charset="-122"/>
                 <a:cs typeface="メイリオ" pitchFamily="34" charset="-120"/>
               </a:rPr>
-              <a:t>持続投与の切れ方は、入れた時間で変わる</a:t>
+              <a:t>持続投与の切れ方は、</a:t>
+            </a:r>
+            <a:r>
+              <a:rPr lang="ja-JP" altLang="en-US" sz="2800" b="1" dirty="0">
+                <a:solidFill>
+                  <a:srgbClr val="D55E00"/>
+                </a:solidFill>
+                <a:latin typeface="メイリオ" pitchFamily="34" charset="0"/>
+                <a:ea typeface="メイリオ" pitchFamily="34" charset="-122"/>
+                <a:cs typeface="メイリオ" pitchFamily="34" charset="-120"/>
+              </a:rPr>
+              <a:t>入れた時間</a:t>
+            </a:r>
+            <a:r>
+              <a:rPr lang="ja-JP" altLang="en-US" sz="2800" dirty="0">
+                <a:solidFill>
+                  <a:srgbClr val="262626"/>
+                </a:solidFill>
+                <a:latin typeface="メイリオ" pitchFamily="34" charset="0"/>
+                <a:ea typeface="メイリオ" pitchFamily="34" charset="-122"/>
+                <a:cs typeface="メイリオ" pitchFamily="34" charset="-120"/>
+              </a:rPr>
+              <a:t>で変わる</a:t>
             </a:r>
             <a:endParaRPr lang="ja-JP" sz="2800" dirty="0"/>
           </a:p>
@@ -2618,7 +2684,29 @@
                 <a:ea typeface="メイリオ" pitchFamily="34" charset="-122"/>
                 <a:cs typeface="メイリオ" pitchFamily="34" charset="-120"/>
               </a:rPr>
-              <a:t>鎮静薬とオピオイドは相乗。併用で量を減らす</a:t>
+              <a:t>鎮静薬とオピオイドは</a:t>
+            </a:r>
+            <a:r>
+              <a:rPr lang="ja-JP" altLang="en-US" sz="2800" b="1" dirty="0">
+                <a:solidFill>
+                  <a:srgbClr val="D55E00"/>
+                </a:solidFill>
+                <a:latin typeface="メイリオ" pitchFamily="34" charset="0"/>
+                <a:ea typeface="メイリオ" pitchFamily="34" charset="-122"/>
+                <a:cs typeface="メイリオ" pitchFamily="34" charset="-120"/>
+              </a:rPr>
+              <a:t>相乗</a:t>
+            </a:r>
+            <a:r>
+              <a:rPr lang="ja-JP" altLang="en-US" sz="2800" dirty="0">
+                <a:solidFill>
+                  <a:srgbClr val="262626"/>
+                </a:solidFill>
+                <a:latin typeface="メイリオ" pitchFamily="34" charset="0"/>
+                <a:ea typeface="メイリオ" pitchFamily="34" charset="-122"/>
+                <a:cs typeface="メイリオ" pitchFamily="34" charset="-120"/>
+              </a:rPr>
+              <a:t>。併用で量を減らす</a:t>
             </a:r>
             <a:endParaRPr lang="ja-JP" sz="2800" dirty="0"/>
           </a:p>
@@ -2639,7 +2727,29 @@
                 <a:ea typeface="メイリオ" pitchFamily="34" charset="-122"/>
                 <a:cs typeface="メイリオ" pitchFamily="34" charset="-120"/>
               </a:rPr>
-              <a:t>高齢・肥満・腎肝・循環不全で、量と速さを変える</a:t>
+              <a:t>高齢・肥満・腎肝・循環不全で、</a:t>
+            </a:r>
+            <a:r>
+              <a:rPr lang="ja-JP" altLang="en-US" sz="2800" b="1" dirty="0">
+                <a:solidFill>
+                  <a:srgbClr val="D55E00"/>
+                </a:solidFill>
+                <a:latin typeface="メイリオ" pitchFamily="34" charset="0"/>
+                <a:ea typeface="メイリオ" pitchFamily="34" charset="-122"/>
+                <a:cs typeface="メイリオ" pitchFamily="34" charset="-120"/>
+              </a:rPr>
+              <a:t>量と速さ</a:t>
+            </a:r>
+            <a:r>
+              <a:rPr lang="ja-JP" altLang="en-US" sz="2800" dirty="0">
+                <a:solidFill>
+                  <a:srgbClr val="262626"/>
+                </a:solidFill>
+                <a:latin typeface="メイリオ" pitchFamily="34" charset="0"/>
+                <a:ea typeface="メイリオ" pitchFamily="34" charset="-122"/>
+                <a:cs typeface="メイリオ" pitchFamily="34" charset="-120"/>
+              </a:rPr>
+              <a:t>を変える</a:t>
             </a:r>
             <a:endParaRPr lang="ja-JP" sz="2800" dirty="0"/>
           </a:p>
@@ -2763,7 +2873,7 @@
           <a:ln/>
         </p:spPr>
         <p:txBody>
-          <a:bodyPr wrap="square" lIns="0" tIns="0" rIns="0" bIns="0" rtlCol="0" anchor="ctr"/>
+          <a:bodyPr wrap="none" lIns="0" tIns="0" rIns="0" bIns="0" rtlCol="0" anchor="ctr"/>
           <a:lstStyle/>
           <a:p>
             <a:pPr algn="ctr" indent="0" marL="0">
@@ -2806,7 +2916,7 @@
           <a:ln/>
         </p:spPr>
         <p:txBody>
-          <a:bodyPr wrap="square" lIns="0" tIns="0" rIns="0" bIns="0" rtlCol="0" anchor="ctr"/>
+          <a:bodyPr wrap="none" lIns="0" tIns="0" rIns="0" bIns="0" rtlCol="0" anchor="ctr"/>
           <a:lstStyle/>
           <a:p>
             <a:pPr algn="ctr" indent="0" marL="0">
@@ -2849,7 +2959,7 @@
           <a:ln/>
         </p:spPr>
         <p:txBody>
-          <a:bodyPr wrap="square" lIns="0" tIns="0" rIns="0" bIns="0" rtlCol="0" anchor="ctr"/>
+          <a:bodyPr wrap="none" lIns="0" tIns="0" rIns="0" bIns="0" rtlCol="0" anchor="ctr"/>
           <a:lstStyle/>
           <a:p>
             <a:pPr algn="ctr" indent="0" marL="0">
@@ -2892,7 +3002,7 @@
           <a:ln/>
         </p:spPr>
         <p:txBody>
-          <a:bodyPr wrap="square" lIns="0" tIns="0" rIns="0" bIns="0" rtlCol="0" anchor="ctr"/>
+          <a:bodyPr wrap="none" lIns="0" tIns="0" rIns="0" bIns="0" rtlCol="0" anchor="ctr"/>
           <a:lstStyle/>
           <a:p>
             <a:pPr algn="ctr" indent="0" marL="0">
@@ -2935,7 +3045,7 @@
           <a:ln/>
         </p:spPr>
         <p:txBody>
-          <a:bodyPr wrap="square" lIns="0" tIns="0" rIns="0" bIns="0" rtlCol="0" anchor="ctr"/>
+          <a:bodyPr wrap="none" lIns="0" tIns="0" rIns="0" bIns="0" rtlCol="0" anchor="ctr"/>
           <a:lstStyle/>
           <a:p>
             <a:pPr algn="ctr" indent="0" marL="0">
@@ -5193,7 +5303,7 @@
           <a:ln/>
         </p:spPr>
         <p:txBody>
-          <a:bodyPr wrap="square" lIns="0" tIns="0" rIns="0" bIns="0" rtlCol="0" anchor="ctr"/>
+          <a:bodyPr wrap="none" lIns="0" tIns="0" rIns="0" bIns="0" rtlCol="0" anchor="ctr"/>
           <a:lstStyle/>
           <a:p>
             <a:pPr algn="ctr" indent="0" marL="0">
@@ -5236,7 +5346,7 @@
           <a:ln/>
         </p:spPr>
         <p:txBody>
-          <a:bodyPr wrap="square" lIns="0" tIns="0" rIns="0" bIns="0" rtlCol="0" anchor="ctr"/>
+          <a:bodyPr wrap="none" lIns="0" tIns="0" rIns="0" bIns="0" rtlCol="0" anchor="ctr"/>
           <a:lstStyle/>
           <a:p>
             <a:pPr algn="ctr" indent="0" marL="0">
@@ -5279,7 +5389,7 @@
           <a:ln/>
         </p:spPr>
         <p:txBody>
-          <a:bodyPr wrap="square" lIns="0" tIns="0" rIns="0" bIns="0" rtlCol="0" anchor="ctr"/>
+          <a:bodyPr wrap="none" lIns="0" tIns="0" rIns="0" bIns="0" rtlCol="0" anchor="ctr"/>
           <a:lstStyle/>
           <a:p>
             <a:pPr algn="ctr" indent="0" marL="0">
@@ -5322,7 +5432,7 @@
           <a:ln/>
         </p:spPr>
         <p:txBody>
-          <a:bodyPr wrap="square" lIns="0" tIns="0" rIns="0" bIns="0" rtlCol="0" anchor="ctr"/>
+          <a:bodyPr wrap="none" lIns="0" tIns="0" rIns="0" bIns="0" rtlCol="0" anchor="ctr"/>
           <a:lstStyle/>
           <a:p>
             <a:pPr algn="ctr" indent="0" marL="0">
@@ -5365,7 +5475,7 @@
           <a:ln/>
         </p:spPr>
         <p:txBody>
-          <a:bodyPr wrap="square" lIns="0" tIns="0" rIns="0" bIns="0" rtlCol="0" anchor="ctr"/>
+          <a:bodyPr wrap="none" lIns="0" tIns="0" rIns="0" bIns="0" rtlCol="0" anchor="ctr"/>
           <a:lstStyle/>
           <a:p>
             <a:pPr algn="ctr" indent="0" marL="0">
@@ -6255,7 +6365,7 @@
           <a:ln/>
         </p:spPr>
         <p:txBody>
-          <a:bodyPr wrap="square" lIns="0" tIns="0" rIns="0" bIns="0" rtlCol="0" anchor="ctr"/>
+          <a:bodyPr wrap="none" lIns="0" tIns="0" rIns="0" bIns="0" rtlCol="0" anchor="ctr"/>
           <a:lstStyle/>
           <a:p>
             <a:pPr algn="ctr" indent="0" marL="0">
@@ -6298,7 +6408,7 @@
           <a:ln/>
         </p:spPr>
         <p:txBody>
-          <a:bodyPr wrap="square" lIns="0" tIns="0" rIns="0" bIns="0" rtlCol="0" anchor="ctr"/>
+          <a:bodyPr wrap="none" lIns="0" tIns="0" rIns="0" bIns="0" rtlCol="0" anchor="ctr"/>
           <a:lstStyle/>
           <a:p>
             <a:pPr algn="ctr" indent="0" marL="0">
@@ -6341,7 +6451,7 @@
           <a:ln/>
         </p:spPr>
         <p:txBody>
-          <a:bodyPr wrap="square" lIns="0" tIns="0" rIns="0" bIns="0" rtlCol="0" anchor="ctr"/>
+          <a:bodyPr wrap="none" lIns="0" tIns="0" rIns="0" bIns="0" rtlCol="0" anchor="ctr"/>
           <a:lstStyle/>
           <a:p>
             <a:pPr algn="ctr" indent="0" marL="0">
@@ -6384,7 +6494,7 @@
           <a:ln/>
         </p:spPr>
         <p:txBody>
-          <a:bodyPr wrap="square" lIns="0" tIns="0" rIns="0" bIns="0" rtlCol="0" anchor="ctr"/>
+          <a:bodyPr wrap="none" lIns="0" tIns="0" rIns="0" bIns="0" rtlCol="0" anchor="ctr"/>
           <a:lstStyle/>
           <a:p>
             <a:pPr algn="ctr" indent="0" marL="0">
@@ -6427,7 +6537,7 @@
           <a:ln/>
         </p:spPr>
         <p:txBody>
-          <a:bodyPr wrap="square" lIns="0" tIns="0" rIns="0" bIns="0" rtlCol="0" anchor="ctr"/>
+          <a:bodyPr wrap="none" lIns="0" tIns="0" rIns="0" bIns="0" rtlCol="0" anchor="ctr"/>
           <a:lstStyle/>
           <a:p>
             <a:pPr algn="ctr" indent="0" marL="0">
@@ -6520,7 +6630,7 @@
                 <a:ea typeface="メイリオ" pitchFamily="34" charset="-122"/>
                 <a:cs typeface="メイリオ" pitchFamily="34" charset="-120"/>
               </a:rPr>
-              <a:t>日本麻酔科学会「麻酔薬および麻酔関連薬使用ガイドライン 第4版」（2025） / Proost JH, et al.</a:t>
+              <a:t>日本麻酔科学会「麻酔薬および麻酔関連薬使用ガイドライン 第4版」（2025）</a:t>
             </a:r>
             <a:endParaRPr lang="ja-JP" sz="1600" dirty="0"/>
           </a:p>
@@ -6537,7 +6647,7 @@
                 <a:ea typeface="メイリオ" pitchFamily="34" charset="-122"/>
                 <a:cs typeface="メイリオ" pitchFamily="34" charset="-120"/>
               </a:rPr>
-              <a:t>Br J Anaesth 2000;85:717-723 / Stöhr T, et al. Br J Anaesth 2021;127:415-423</a:t>
+              <a:t>Proost et al. Br J Anaesth 2000;85:717-723 / Stöhr et al. Br J Anaesth 2021;127:415-423</a:t>
             </a:r>
             <a:endParaRPr lang="ja-JP" sz="1600" dirty="0"/>
           </a:p>
@@ -6552,11 +6662,11 @@
         <p:spPr>
           <a:xfrm>
             <a:off x="502920" y="1691640"/>
-            <a:ext cx="5477256" cy="2121408"/>
+            <a:ext cx="6537960" cy="1874520"/>
           </a:xfrm>
           <a:prstGeom prst="roundRect">
             <a:avLst>
-              <a:gd name="adj" fmla="val 3448"/>
+              <a:gd name="adj" fmla="val 3902"/>
             </a:avLst>
           </a:prstGeom>
           <a:solidFill>
@@ -6574,7 +6684,7 @@
         <p:spPr>
           <a:xfrm>
             <a:off x="640080" y="1828800"/>
-            <a:ext cx="5202936" cy="457200"/>
+            <a:ext cx="6263640" cy="457200"/>
           </a:xfrm>
           <a:prstGeom prst="rect">
             <a:avLst/>
@@ -6613,7 +6723,7 @@
         <p:spPr>
           <a:xfrm>
             <a:off x="640080" y="2359152"/>
-            <a:ext cx="5202936" cy="1316736"/>
+            <a:ext cx="6263640" cy="1069848"/>
           </a:xfrm>
           <a:prstGeom prst="rect">
             <a:avLst/>
@@ -6626,6 +6736,9 @@
           <a:lstStyle/>
           <a:p>
             <a:pPr algn="l" indent="0" marL="0">
+              <a:spcAft>
+                <a:spcPts val="800"/>
+              </a:spcAft>
               <a:buNone/>
             </a:pPr>
             <a:r>
@@ -6637,12 +6750,15 @@
                 <a:ea typeface="メイリオ" pitchFamily="34" charset="-122"/>
                 <a:cs typeface="メイリオ" pitchFamily="34" charset="-120"/>
               </a:rPr>
-              <a:t>プロポフォール、ミダゾラム、</a:t>
+              <a:t>プロポフォール、ミダゾラム、レミマゾラム</a:t>
             </a:r>
             <a:endParaRPr lang="ja-JP" sz="2200" dirty="0"/>
           </a:p>
           <a:p>
             <a:pPr algn="l" indent="0" marL="0">
+              <a:spcAft>
+                <a:spcPts val="800"/>
+              </a:spcAft>
               <a:buNone/>
             </a:pPr>
             <a:r>
@@ -6654,23 +6770,6 @@
                 <a:ea typeface="メイリオ" pitchFamily="34" charset="-122"/>
                 <a:cs typeface="メイリオ" pitchFamily="34" charset="-120"/>
               </a:rPr>
-              <a:t>レミマゾラム</a:t>
-            </a:r>
-            <a:endParaRPr lang="ja-JP" sz="2200" dirty="0"/>
-          </a:p>
-          <a:p>
-            <a:pPr algn="l" indent="0" marL="0">
-              <a:buNone/>
-            </a:pPr>
-            <a:r>
-              <a:rPr lang="ja-JP" altLang="en-US" sz="2200" dirty="0">
-                <a:solidFill>
-                  <a:srgbClr val="262626"/>
-                </a:solidFill>
-                <a:latin typeface="メイリオ" pitchFamily="34" charset="0"/>
-                <a:ea typeface="メイリオ" pitchFamily="34" charset="-122"/>
-                <a:cs typeface="メイリオ" pitchFamily="34" charset="-120"/>
-              </a:rPr>
               <a:t>肝血流・肝機能で変わる</a:t>
             </a:r>
             <a:endParaRPr lang="ja-JP" sz="2200" dirty="0"/>
@@ -6685,12 +6784,12 @@
         </p:nvSpPr>
         <p:spPr>
           <a:xfrm>
-            <a:off x="6208776" y="1691640"/>
-            <a:ext cx="5477256" cy="2121408"/>
+            <a:off x="7269480" y="1691640"/>
+            <a:ext cx="4416552" cy="1874520"/>
           </a:xfrm>
           <a:prstGeom prst="roundRect">
             <a:avLst>
-              <a:gd name="adj" fmla="val 3448"/>
+              <a:gd name="adj" fmla="val 3902"/>
             </a:avLst>
           </a:prstGeom>
           <a:solidFill>
@@ -6707,8 +6806,8 @@
         </p:nvSpPr>
         <p:spPr>
           <a:xfrm>
-            <a:off x="6345936" y="1828800"/>
-            <a:ext cx="5202936" cy="457200"/>
+            <a:off x="7406640" y="1828800"/>
+            <a:ext cx="4142232" cy="457200"/>
           </a:xfrm>
           <a:prstGeom prst="rect">
             <a:avLst/>
@@ -6726,7 +6825,7 @@
             <a:r>
               <a:rPr lang="ja-JP" altLang="en-US" sz="2400" b="1" dirty="0">
                 <a:solidFill>
-                  <a:srgbClr val="00A8AA"/>
+                  <a:srgbClr val="0072B2"/>
                 </a:solidFill>
                 <a:latin typeface="メイリオ" pitchFamily="34" charset="0"/>
                 <a:ea typeface="メイリオ" pitchFamily="34" charset="-122"/>
@@ -6746,8 +6845,8 @@
         </p:nvSpPr>
         <p:spPr>
           <a:xfrm>
-            <a:off x="6345936" y="2359152"/>
-            <a:ext cx="5202936" cy="1316736"/>
+            <a:off x="7406640" y="2359152"/>
+            <a:ext cx="4142232" cy="1069848"/>
           </a:xfrm>
           <a:prstGeom prst="rect">
             <a:avLst/>
@@ -6760,6 +6859,9 @@
           <a:lstStyle/>
           <a:p>
             <a:pPr algn="l" indent="0" marL="0">
+              <a:spcAft>
+                <a:spcPts val="800"/>
+              </a:spcAft>
               <a:buNone/>
             </a:pPr>
             <a:r>
@@ -6777,6 +6879,9 @@
           </a:p>
           <a:p>
             <a:pPr algn="l" indent="0" marL="0">
+              <a:spcAft>
+                <a:spcPts val="800"/>
+              </a:spcAft>
               <a:buNone/>
             </a:pPr>
             <a:r>
@@ -6802,12 +6907,12 @@
         </p:nvSpPr>
         <p:spPr>
           <a:xfrm>
-            <a:off x="502920" y="4041648"/>
-            <a:ext cx="5477256" cy="1828800"/>
+            <a:off x="502920" y="3840480"/>
+            <a:ext cx="6537960" cy="1874520"/>
           </a:xfrm>
           <a:prstGeom prst="roundRect">
             <a:avLst>
-              <a:gd name="adj" fmla="val 4000"/>
+              <a:gd name="adj" fmla="val 3902"/>
             </a:avLst>
           </a:prstGeom>
           <a:solidFill>
@@ -6824,8 +6929,8 @@
         </p:nvSpPr>
         <p:spPr>
           <a:xfrm>
-            <a:off x="640080" y="4178808"/>
-            <a:ext cx="5202936" cy="457200"/>
+            <a:off x="640080" y="3977640"/>
+            <a:ext cx="6263640" cy="457200"/>
           </a:xfrm>
           <a:prstGeom prst="rect">
             <a:avLst/>
@@ -6843,7 +6948,7 @@
             <a:r>
               <a:rPr lang="ja-JP" altLang="en-US" sz="2400" b="1" dirty="0">
                 <a:solidFill>
-                  <a:srgbClr val="D55E00"/>
+                  <a:srgbClr val="0072B2"/>
                 </a:solidFill>
                 <a:latin typeface="メイリオ" pitchFamily="34" charset="0"/>
                 <a:ea typeface="メイリオ" pitchFamily="34" charset="-122"/>
@@ -6863,8 +6968,8 @@
         </p:nvSpPr>
         <p:spPr>
           <a:xfrm>
-            <a:off x="640080" y="4709160"/>
-            <a:ext cx="5202936" cy="1024128"/>
+            <a:off x="640080" y="4507992"/>
+            <a:ext cx="6263640" cy="1069848"/>
           </a:xfrm>
           <a:prstGeom prst="rect">
             <a:avLst/>
@@ -6877,6 +6982,9 @@
           <a:lstStyle/>
           <a:p>
             <a:pPr algn="l" indent="0" marL="0">
+              <a:spcAft>
+                <a:spcPts val="800"/>
+              </a:spcAft>
               <a:buNone/>
             </a:pPr>
             <a:r>
@@ -6894,6 +7002,9 @@
           </a:p>
           <a:p>
             <a:pPr algn="l" indent="0" marL="0">
+              <a:spcAft>
+                <a:spcPts val="800"/>
+              </a:spcAft>
               <a:buNone/>
             </a:pPr>
             <a:r>
@@ -6919,12 +7030,12 @@
         </p:nvSpPr>
         <p:spPr>
           <a:xfrm>
-            <a:off x="6208776" y="4041648"/>
-            <a:ext cx="5477256" cy="1828800"/>
+            <a:off x="7269480" y="3840480"/>
+            <a:ext cx="4416552" cy="1874520"/>
           </a:xfrm>
           <a:prstGeom prst="roundRect">
             <a:avLst>
-              <a:gd name="adj" fmla="val 4000"/>
+              <a:gd name="adj" fmla="val 3902"/>
             </a:avLst>
           </a:prstGeom>
           <a:solidFill>
@@ -6941,8 +7052,8 @@
         </p:nvSpPr>
         <p:spPr>
           <a:xfrm>
-            <a:off x="6345936" y="4178808"/>
-            <a:ext cx="5202936" cy="457200"/>
+            <a:off x="7406640" y="3977640"/>
+            <a:ext cx="4142232" cy="457200"/>
           </a:xfrm>
           <a:prstGeom prst="rect">
             <a:avLst/>
@@ -6980,8 +7091,8 @@
         </p:nvSpPr>
         <p:spPr>
           <a:xfrm>
-            <a:off x="6345936" y="4709160"/>
-            <a:ext cx="5202936" cy="1024128"/>
+            <a:off x="7406640" y="4507992"/>
+            <a:ext cx="4142232" cy="1069848"/>
           </a:xfrm>
           <a:prstGeom prst="rect">
             <a:avLst/>
@@ -6994,6 +7105,9 @@
           <a:lstStyle/>
           <a:p>
             <a:pPr algn="l" indent="0" marL="0">
+              <a:spcAft>
+                <a:spcPts val="800"/>
+              </a:spcAft>
               <a:buNone/>
             </a:pPr>
             <a:r>
@@ -7011,6 +7125,9 @@
           </a:p>
           <a:p>
             <a:pPr algn="l" indent="0" marL="0">
+              <a:spcAft>
+                <a:spcPts val="800"/>
+              </a:spcAft>
               <a:buNone/>
             </a:pPr>
             <a:r>
@@ -7146,7 +7263,7 @@
           <a:ln/>
         </p:spPr>
         <p:txBody>
-          <a:bodyPr wrap="square" lIns="0" tIns="0" rIns="0" bIns="0" rtlCol="0" anchor="ctr"/>
+          <a:bodyPr wrap="none" lIns="0" tIns="0" rIns="0" bIns="0" rtlCol="0" anchor="ctr"/>
           <a:lstStyle/>
           <a:p>
             <a:pPr algn="ctr" indent="0" marL="0">
@@ -7189,7 +7306,7 @@
           <a:ln/>
         </p:spPr>
         <p:txBody>
-          <a:bodyPr wrap="square" lIns="0" tIns="0" rIns="0" bIns="0" rtlCol="0" anchor="ctr"/>
+          <a:bodyPr wrap="none" lIns="0" tIns="0" rIns="0" bIns="0" rtlCol="0" anchor="ctr"/>
           <a:lstStyle/>
           <a:p>
             <a:pPr algn="ctr" indent="0" marL="0">
@@ -7232,7 +7349,7 @@
           <a:ln/>
         </p:spPr>
         <p:txBody>
-          <a:bodyPr wrap="square" lIns="0" tIns="0" rIns="0" bIns="0" rtlCol="0" anchor="ctr"/>
+          <a:bodyPr wrap="none" lIns="0" tIns="0" rIns="0" bIns="0" rtlCol="0" anchor="ctr"/>
           <a:lstStyle/>
           <a:p>
             <a:pPr algn="ctr" indent="0" marL="0">
@@ -7275,7 +7392,7 @@
           <a:ln/>
         </p:spPr>
         <p:txBody>
-          <a:bodyPr wrap="square" lIns="0" tIns="0" rIns="0" bIns="0" rtlCol="0" anchor="ctr"/>
+          <a:bodyPr wrap="none" lIns="0" tIns="0" rIns="0" bIns="0" rtlCol="0" anchor="ctr"/>
           <a:lstStyle/>
           <a:p>
             <a:pPr algn="ctr" indent="0" marL="0">
@@ -7318,7 +7435,7 @@
           <a:ln/>
         </p:spPr>
         <p:txBody>
-          <a:bodyPr wrap="square" lIns="0" tIns="0" rIns="0" bIns="0" rtlCol="0" anchor="ctr"/>
+          <a:bodyPr wrap="none" lIns="0" tIns="0" rIns="0" bIns="0" rtlCol="0" anchor="ctr"/>
           <a:lstStyle/>
           <a:p>
             <a:pPr algn="ctr" indent="0" marL="0">
@@ -7411,7 +7528,7 @@
                 <a:ea typeface="メイリオ" pitchFamily="34" charset="-122"/>
                 <a:cs typeface="メイリオ" pitchFamily="34" charset="-120"/>
               </a:rPr>
-              <a:t>Hughes MA, et al. Anesthesiology 1992;76:334-341 / Kapila A, et al. Anesthesiology</a:t>
+              <a:t>Hughes 1992 Anesthesiology 76:334-341 / Kapila 1995 Anesthesiology 83:968-975</a:t>
             </a:r>
             <a:endParaRPr lang="ja-JP" sz="1600" dirty="0"/>
           </a:p>
@@ -7428,7 +7545,7 @@
                 <a:ea typeface="メイリオ" pitchFamily="34" charset="-122"/>
                 <a:cs typeface="メイリオ" pitchFamily="34" charset="-120"/>
               </a:rPr>
-              <a:t>1995;83:968-975 / Sahinovic MM, et al. Clin Pharmacokinet 2018;57:1539-1558</a:t>
+              <a:t>Sahinovic MM, et al. Clin Pharmacokinet 2018;57:1539-1558</a:t>
             </a:r>
             <a:endParaRPr lang="ja-JP" sz="1600" dirty="0"/>
           </a:p>
@@ -7442,8 +7559,8 @@
         </p:nvSpPr>
         <p:spPr>
           <a:xfrm>
-            <a:off x="914400" y="2388413"/>
-            <a:ext cx="9144" cy="2732227"/>
+            <a:off x="914400" y="2571293"/>
+            <a:ext cx="9144" cy="2549347"/>
           </a:xfrm>
           <a:custGeom>
             <a:avLst/>
@@ -7452,9 +7569,9 @@
             <a:cxnLst/>
             <a:rect l="l" t="t" r="r" b="b"/>
             <a:pathLst>
-              <a:path w="9144" h="2732227">
+              <a:path w="9144" h="2549347">
                 <a:moveTo>
-                  <a:pt x="0" y="2732227"/>
+                  <a:pt x="0" y="2549347"/>
                 </a:moveTo>
                 <a:lnTo>
                   <a:pt x="0" y="0"/>
@@ -7479,7 +7596,7 @@
         </p:nvSpPr>
         <p:spPr>
           <a:xfrm>
-            <a:off x="841248" y="2286000"/>
+            <a:off x="841248" y="2468880"/>
             <a:ext cx="146304" cy="146304"/>
           </a:xfrm>
           <a:custGeom>
@@ -7602,8 +7719,8 @@
         </p:nvSpPr>
         <p:spPr>
           <a:xfrm>
-            <a:off x="950976" y="2450592"/>
-            <a:ext cx="3118104" cy="2468880"/>
+            <a:off x="950976" y="2587752"/>
+            <a:ext cx="3118104" cy="2331720"/>
           </a:xfrm>
           <a:custGeom>
             <a:avLst/>
@@ -7612,480 +7729,480 @@
             <a:cxnLst/>
             <a:rect l="l" t="t" r="r" b="b"/>
             <a:pathLst>
-              <a:path w="3118104" h="2468880">
+              <a:path w="3118104" h="2331720">
                 <a:moveTo>
-                  <a:pt x="0" y="2468880"/>
+                  <a:pt x="0" y="2331720"/>
                 </a:moveTo>
                 <a:lnTo>
-                  <a:pt x="19202" y="2459736"/>
-                </a:lnTo>
-                <a:lnTo>
-                  <a:pt x="39319" y="2446934"/>
-                </a:lnTo>
-                <a:lnTo>
-                  <a:pt x="58522" y="2432304"/>
-                </a:lnTo>
-                <a:lnTo>
-                  <a:pt x="77724" y="2416759"/>
-                </a:lnTo>
-                <a:lnTo>
-                  <a:pt x="97841" y="2399386"/>
-                </a:lnTo>
-                <a:lnTo>
-                  <a:pt x="117043" y="2381098"/>
-                </a:lnTo>
-                <a:lnTo>
-                  <a:pt x="136246" y="2361895"/>
-                </a:lnTo>
-                <a:lnTo>
-                  <a:pt x="156362" y="2341778"/>
-                </a:lnTo>
-                <a:lnTo>
-                  <a:pt x="175565" y="2321662"/>
-                </a:lnTo>
-                <a:lnTo>
-                  <a:pt x="194767" y="2300630"/>
-                </a:lnTo>
-                <a:lnTo>
-                  <a:pt x="213970" y="2279599"/>
-                </a:lnTo>
-                <a:lnTo>
-                  <a:pt x="234086" y="2257654"/>
-                </a:lnTo>
-                <a:lnTo>
-                  <a:pt x="253289" y="2235708"/>
-                </a:lnTo>
-                <a:lnTo>
-                  <a:pt x="272491" y="2212848"/>
-                </a:lnTo>
-                <a:lnTo>
-                  <a:pt x="292608" y="2189988"/>
-                </a:lnTo>
-                <a:lnTo>
-                  <a:pt x="311810" y="2167128"/>
-                </a:lnTo>
-                <a:lnTo>
-                  <a:pt x="331013" y="2143354"/>
-                </a:lnTo>
-                <a:lnTo>
-                  <a:pt x="351130" y="2119579"/>
-                </a:lnTo>
-                <a:lnTo>
-                  <a:pt x="370332" y="2095805"/>
-                </a:lnTo>
-                <a:lnTo>
-                  <a:pt x="389534" y="2072030"/>
-                </a:lnTo>
-                <a:lnTo>
-                  <a:pt x="409651" y="2047342"/>
-                </a:lnTo>
-                <a:lnTo>
-                  <a:pt x="428854" y="2022653"/>
-                </a:lnTo>
-                <a:lnTo>
-                  <a:pt x="448056" y="1998878"/>
-                </a:lnTo>
-                <a:lnTo>
-                  <a:pt x="467258" y="1974190"/>
-                </a:lnTo>
-                <a:lnTo>
-                  <a:pt x="487375" y="1949501"/>
-                </a:lnTo>
-                <a:lnTo>
-                  <a:pt x="506578" y="1923898"/>
-                </a:lnTo>
-                <a:lnTo>
-                  <a:pt x="525780" y="1899209"/>
-                </a:lnTo>
-                <a:lnTo>
-                  <a:pt x="545897" y="1874520"/>
-                </a:lnTo>
-                <a:lnTo>
-                  <a:pt x="565099" y="1849831"/>
-                </a:lnTo>
-                <a:lnTo>
-                  <a:pt x="584302" y="1825142"/>
-                </a:lnTo>
-                <a:lnTo>
-                  <a:pt x="604418" y="1799539"/>
-                </a:lnTo>
-                <a:lnTo>
-                  <a:pt x="623621" y="1774850"/>
-                </a:lnTo>
-                <a:lnTo>
-                  <a:pt x="642823" y="1750162"/>
-                </a:lnTo>
-                <a:lnTo>
-                  <a:pt x="662940" y="1725473"/>
-                </a:lnTo>
-                <a:lnTo>
-                  <a:pt x="682142" y="1700784"/>
-                </a:lnTo>
-                <a:lnTo>
-                  <a:pt x="701345" y="1676095"/>
-                </a:lnTo>
-                <a:lnTo>
-                  <a:pt x="721462" y="1651406"/>
-                </a:lnTo>
-                <a:lnTo>
-                  <a:pt x="740664" y="1626718"/>
-                </a:lnTo>
-                <a:lnTo>
-                  <a:pt x="759866" y="1602029"/>
-                </a:lnTo>
-                <a:lnTo>
-                  <a:pt x="779983" y="1577340"/>
-                </a:lnTo>
-                <a:lnTo>
-                  <a:pt x="799186" y="1552651"/>
-                </a:lnTo>
-                <a:lnTo>
-                  <a:pt x="818388" y="1528877"/>
-                </a:lnTo>
-                <a:lnTo>
-                  <a:pt x="837590" y="1505102"/>
-                </a:lnTo>
-                <a:lnTo>
-                  <a:pt x="857707" y="1480414"/>
-                </a:lnTo>
-                <a:lnTo>
-                  <a:pt x="876910" y="1456639"/>
-                </a:lnTo>
-                <a:lnTo>
-                  <a:pt x="896112" y="1432865"/>
-                </a:lnTo>
-                <a:lnTo>
-                  <a:pt x="916229" y="1409090"/>
-                </a:lnTo>
-                <a:lnTo>
-                  <a:pt x="935431" y="1386230"/>
-                </a:lnTo>
-                <a:lnTo>
-                  <a:pt x="954634" y="1362456"/>
-                </a:lnTo>
-                <a:lnTo>
-                  <a:pt x="974750" y="1339596"/>
-                </a:lnTo>
-                <a:lnTo>
-                  <a:pt x="993953" y="1316736"/>
-                </a:lnTo>
-                <a:lnTo>
-                  <a:pt x="1013155" y="1293876"/>
-                </a:lnTo>
-                <a:lnTo>
-                  <a:pt x="1033272" y="1271016"/>
-                </a:lnTo>
-                <a:lnTo>
-                  <a:pt x="1052474" y="1249070"/>
-                </a:lnTo>
-                <a:lnTo>
-                  <a:pt x="1071677" y="1226210"/>
-                </a:lnTo>
-                <a:lnTo>
-                  <a:pt x="1091794" y="1204265"/>
-                </a:lnTo>
-                <a:lnTo>
-                  <a:pt x="1110996" y="1182319"/>
-                </a:lnTo>
-                <a:lnTo>
-                  <a:pt x="1130198" y="1160374"/>
-                </a:lnTo>
-                <a:lnTo>
-                  <a:pt x="1149401" y="1139342"/>
-                </a:lnTo>
-                <a:lnTo>
-                  <a:pt x="1169518" y="1117397"/>
-                </a:lnTo>
-                <a:lnTo>
-                  <a:pt x="1188720" y="1096366"/>
-                </a:lnTo>
-                <a:lnTo>
-                  <a:pt x="1207922" y="1075334"/>
-                </a:lnTo>
-                <a:lnTo>
-                  <a:pt x="1228039" y="1055218"/>
-                </a:lnTo>
-                <a:lnTo>
-                  <a:pt x="1247242" y="1034186"/>
-                </a:lnTo>
-                <a:lnTo>
-                  <a:pt x="1266444" y="1014070"/>
-                </a:lnTo>
-                <a:lnTo>
-                  <a:pt x="1286561" y="993953"/>
-                </a:lnTo>
-                <a:lnTo>
-                  <a:pt x="1305763" y="973836"/>
-                </a:lnTo>
-                <a:lnTo>
-                  <a:pt x="1324966" y="954634"/>
-                </a:lnTo>
-                <a:lnTo>
-                  <a:pt x="1345082" y="935431"/>
-                </a:lnTo>
-                <a:lnTo>
-                  <a:pt x="1364285" y="916229"/>
-                </a:lnTo>
-                <a:lnTo>
-                  <a:pt x="1383487" y="897026"/>
-                </a:lnTo>
-                <a:lnTo>
-                  <a:pt x="1403604" y="877824"/>
-                </a:lnTo>
-                <a:lnTo>
-                  <a:pt x="1422806" y="859536"/>
-                </a:lnTo>
-                <a:lnTo>
-                  <a:pt x="1442009" y="841248"/>
-                </a:lnTo>
-                <a:lnTo>
-                  <a:pt x="1461211" y="822960"/>
-                </a:lnTo>
-                <a:lnTo>
-                  <a:pt x="1481328" y="805586"/>
-                </a:lnTo>
-                <a:lnTo>
-                  <a:pt x="1500530" y="788213"/>
-                </a:lnTo>
-                <a:lnTo>
-                  <a:pt x="1519733" y="769925"/>
-                </a:lnTo>
-                <a:lnTo>
-                  <a:pt x="1539850" y="753466"/>
-                </a:lnTo>
-                <a:lnTo>
-                  <a:pt x="1559052" y="736092"/>
-                </a:lnTo>
-                <a:lnTo>
-                  <a:pt x="1578254" y="719633"/>
-                </a:lnTo>
-                <a:lnTo>
-                  <a:pt x="1598371" y="703174"/>
-                </a:lnTo>
-                <a:lnTo>
-                  <a:pt x="1617574" y="686714"/>
-                </a:lnTo>
-                <a:lnTo>
-                  <a:pt x="1636776" y="670255"/>
-                </a:lnTo>
-                <a:lnTo>
-                  <a:pt x="1656893" y="654710"/>
-                </a:lnTo>
-                <a:lnTo>
-                  <a:pt x="1676095" y="639166"/>
-                </a:lnTo>
-                <a:lnTo>
-                  <a:pt x="1695298" y="623621"/>
-                </a:lnTo>
-                <a:lnTo>
-                  <a:pt x="1715414" y="608990"/>
-                </a:lnTo>
-                <a:lnTo>
-                  <a:pt x="1734617" y="593446"/>
-                </a:lnTo>
-                <a:lnTo>
-                  <a:pt x="1753819" y="578815"/>
-                </a:lnTo>
-                <a:lnTo>
-                  <a:pt x="1773022" y="564185"/>
-                </a:lnTo>
-                <a:lnTo>
-                  <a:pt x="1793138" y="550469"/>
-                </a:lnTo>
-                <a:lnTo>
-                  <a:pt x="1812341" y="535838"/>
-                </a:lnTo>
-                <a:lnTo>
-                  <a:pt x="1831543" y="522122"/>
-                </a:lnTo>
-                <a:lnTo>
-                  <a:pt x="1851660" y="508406"/>
-                </a:lnTo>
-                <a:lnTo>
-                  <a:pt x="1870862" y="495605"/>
-                </a:lnTo>
-                <a:lnTo>
-                  <a:pt x="1890065" y="481889"/>
-                </a:lnTo>
-                <a:lnTo>
-                  <a:pt x="1910182" y="469087"/>
-                </a:lnTo>
-                <a:lnTo>
-                  <a:pt x="1929384" y="456286"/>
-                </a:lnTo>
-                <a:lnTo>
-                  <a:pt x="1948586" y="443484"/>
-                </a:lnTo>
-                <a:lnTo>
-                  <a:pt x="1968703" y="431597"/>
-                </a:lnTo>
-                <a:lnTo>
-                  <a:pt x="1987906" y="418795"/>
-                </a:lnTo>
-                <a:lnTo>
-                  <a:pt x="2007108" y="406908"/>
-                </a:lnTo>
-                <a:lnTo>
-                  <a:pt x="2027225" y="395935"/>
-                </a:lnTo>
-                <a:lnTo>
-                  <a:pt x="2046427" y="384048"/>
-                </a:lnTo>
-                <a:lnTo>
-                  <a:pt x="2065630" y="373075"/>
-                </a:lnTo>
-                <a:lnTo>
-                  <a:pt x="2084832" y="361188"/>
-                </a:lnTo>
-                <a:lnTo>
-                  <a:pt x="2104949" y="350215"/>
-                </a:lnTo>
-                <a:lnTo>
-                  <a:pt x="2124151" y="340157"/>
-                </a:lnTo>
-                <a:lnTo>
-                  <a:pt x="2143354" y="329184"/>
-                </a:lnTo>
-                <a:lnTo>
-                  <a:pt x="2163470" y="319126"/>
-                </a:lnTo>
-                <a:lnTo>
-                  <a:pt x="2182673" y="309067"/>
-                </a:lnTo>
-                <a:lnTo>
-                  <a:pt x="2201875" y="299009"/>
-                </a:lnTo>
-                <a:lnTo>
-                  <a:pt x="2221992" y="288950"/>
-                </a:lnTo>
-                <a:lnTo>
-                  <a:pt x="2241194" y="278892"/>
-                </a:lnTo>
-                <a:lnTo>
-                  <a:pt x="2260397" y="269748"/>
-                </a:lnTo>
-                <a:lnTo>
-                  <a:pt x="2280514" y="260604"/>
-                </a:lnTo>
-                <a:lnTo>
-                  <a:pt x="2299716" y="251460"/>
-                </a:lnTo>
-                <a:lnTo>
-                  <a:pt x="2318918" y="242316"/>
-                </a:lnTo>
-                <a:lnTo>
-                  <a:pt x="2339035" y="234086"/>
-                </a:lnTo>
-                <a:lnTo>
-                  <a:pt x="2358238" y="224942"/>
-                </a:lnTo>
-                <a:lnTo>
-                  <a:pt x="2377440" y="216713"/>
-                </a:lnTo>
-                <a:lnTo>
-                  <a:pt x="2396642" y="208483"/>
-                </a:lnTo>
-                <a:lnTo>
-                  <a:pt x="2416759" y="200254"/>
-                </a:lnTo>
-                <a:lnTo>
-                  <a:pt x="2435962" y="192938"/>
-                </a:lnTo>
-                <a:lnTo>
-                  <a:pt x="2455164" y="184709"/>
-                </a:lnTo>
-                <a:lnTo>
-                  <a:pt x="2475281" y="177394"/>
-                </a:lnTo>
-                <a:lnTo>
-                  <a:pt x="2494483" y="170078"/>
-                </a:lnTo>
-                <a:lnTo>
-                  <a:pt x="2513686" y="162763"/>
-                </a:lnTo>
-                <a:lnTo>
-                  <a:pt x="2533802" y="155448"/>
-                </a:lnTo>
-                <a:lnTo>
-                  <a:pt x="2553005" y="148133"/>
-                </a:lnTo>
-                <a:lnTo>
-                  <a:pt x="2572207" y="141732"/>
-                </a:lnTo>
-                <a:lnTo>
-                  <a:pt x="2592324" y="134417"/>
-                </a:lnTo>
-                <a:lnTo>
-                  <a:pt x="2611526" y="128016"/>
-                </a:lnTo>
-                <a:lnTo>
-                  <a:pt x="2630729" y="121615"/>
-                </a:lnTo>
-                <a:lnTo>
-                  <a:pt x="2650846" y="115214"/>
-                </a:lnTo>
-                <a:lnTo>
-                  <a:pt x="2670048" y="108814"/>
-                </a:lnTo>
-                <a:lnTo>
-                  <a:pt x="2689250" y="103327"/>
-                </a:lnTo>
-                <a:lnTo>
-                  <a:pt x="2708453" y="96926"/>
-                </a:lnTo>
-                <a:lnTo>
-                  <a:pt x="2728570" y="91440"/>
-                </a:lnTo>
-                <a:lnTo>
-                  <a:pt x="2747772" y="85954"/>
-                </a:lnTo>
-                <a:lnTo>
-                  <a:pt x="2766974" y="80467"/>
-                </a:lnTo>
-                <a:lnTo>
-                  <a:pt x="2787091" y="74981"/>
-                </a:lnTo>
-                <a:lnTo>
-                  <a:pt x="2806294" y="69494"/>
-                </a:lnTo>
-                <a:lnTo>
-                  <a:pt x="2825496" y="64922"/>
-                </a:lnTo>
-                <a:lnTo>
-                  <a:pt x="2845613" y="59436"/>
-                </a:lnTo>
-                <a:lnTo>
-                  <a:pt x="2864815" y="54864"/>
-                </a:lnTo>
-                <a:lnTo>
-                  <a:pt x="2884018" y="49378"/>
-                </a:lnTo>
-                <a:lnTo>
-                  <a:pt x="2904134" y="44806"/>
-                </a:lnTo>
-                <a:lnTo>
-                  <a:pt x="2923337" y="40234"/>
-                </a:lnTo>
-                <a:lnTo>
-                  <a:pt x="2942539" y="35662"/>
-                </a:lnTo>
-                <a:lnTo>
-                  <a:pt x="2962656" y="31090"/>
-                </a:lnTo>
-                <a:lnTo>
-                  <a:pt x="2981858" y="27432"/>
-                </a:lnTo>
-                <a:lnTo>
-                  <a:pt x="3001061" y="22860"/>
-                </a:lnTo>
-                <a:lnTo>
-                  <a:pt x="3020263" y="19202"/>
+                  <a:pt x="19202" y="2323490"/>
+                </a:lnTo>
+                <a:lnTo>
+                  <a:pt x="39319" y="2311603"/>
+                </a:lnTo>
+                <a:lnTo>
+                  <a:pt x="58522" y="2296973"/>
+                </a:lnTo>
+                <a:lnTo>
+                  <a:pt x="77724" y="2282342"/>
+                </a:lnTo>
+                <a:lnTo>
+                  <a:pt x="97841" y="2265883"/>
+                </a:lnTo>
+                <a:lnTo>
+                  <a:pt x="117043" y="2248510"/>
+                </a:lnTo>
+                <a:lnTo>
+                  <a:pt x="136246" y="2230222"/>
+                </a:lnTo>
+                <a:lnTo>
+                  <a:pt x="156362" y="2211934"/>
+                </a:lnTo>
+                <a:lnTo>
+                  <a:pt x="175565" y="2192731"/>
+                </a:lnTo>
+                <a:lnTo>
+                  <a:pt x="194767" y="2172614"/>
+                </a:lnTo>
+                <a:lnTo>
+                  <a:pt x="213970" y="2152498"/>
+                </a:lnTo>
+                <a:lnTo>
+                  <a:pt x="234086" y="2132381"/>
+                </a:lnTo>
+                <a:lnTo>
+                  <a:pt x="253289" y="2111350"/>
+                </a:lnTo>
+                <a:lnTo>
+                  <a:pt x="272491" y="2090318"/>
+                </a:lnTo>
+                <a:lnTo>
+                  <a:pt x="292608" y="2068373"/>
+                </a:lnTo>
+                <a:lnTo>
+                  <a:pt x="311810" y="2046427"/>
+                </a:lnTo>
+                <a:lnTo>
+                  <a:pt x="331013" y="2024482"/>
+                </a:lnTo>
+                <a:lnTo>
+                  <a:pt x="351130" y="2001622"/>
+                </a:lnTo>
+                <a:lnTo>
+                  <a:pt x="370332" y="1979676"/>
+                </a:lnTo>
+                <a:lnTo>
+                  <a:pt x="389534" y="1956816"/>
+                </a:lnTo>
+                <a:lnTo>
+                  <a:pt x="409651" y="1933956"/>
+                </a:lnTo>
+                <a:lnTo>
+                  <a:pt x="428854" y="1910182"/>
+                </a:lnTo>
+                <a:lnTo>
+                  <a:pt x="448056" y="1887322"/>
+                </a:lnTo>
+                <a:lnTo>
+                  <a:pt x="467258" y="1864462"/>
+                </a:lnTo>
+                <a:lnTo>
+                  <a:pt x="487375" y="1840687"/>
+                </a:lnTo>
+                <a:lnTo>
+                  <a:pt x="506578" y="1817827"/>
+                </a:lnTo>
+                <a:lnTo>
+                  <a:pt x="525780" y="1794053"/>
+                </a:lnTo>
+                <a:lnTo>
+                  <a:pt x="545897" y="1770278"/>
+                </a:lnTo>
+                <a:lnTo>
+                  <a:pt x="565099" y="1746504"/>
+                </a:lnTo>
+                <a:lnTo>
+                  <a:pt x="584302" y="1723644"/>
+                </a:lnTo>
+                <a:lnTo>
+                  <a:pt x="604418" y="1699870"/>
+                </a:lnTo>
+                <a:lnTo>
+                  <a:pt x="623621" y="1676095"/>
+                </a:lnTo>
+                <a:lnTo>
+                  <a:pt x="642823" y="1653235"/>
+                </a:lnTo>
+                <a:lnTo>
+                  <a:pt x="662940" y="1629461"/>
+                </a:lnTo>
+                <a:lnTo>
+                  <a:pt x="682142" y="1605686"/>
+                </a:lnTo>
+                <a:lnTo>
+                  <a:pt x="701345" y="1582826"/>
+                </a:lnTo>
+                <a:lnTo>
+                  <a:pt x="721462" y="1559052"/>
+                </a:lnTo>
+                <a:lnTo>
+                  <a:pt x="740664" y="1536192"/>
+                </a:lnTo>
+                <a:lnTo>
+                  <a:pt x="759866" y="1512418"/>
+                </a:lnTo>
+                <a:lnTo>
+                  <a:pt x="779983" y="1489558"/>
+                </a:lnTo>
+                <a:lnTo>
+                  <a:pt x="799186" y="1466698"/>
+                </a:lnTo>
+                <a:lnTo>
+                  <a:pt x="818388" y="1443838"/>
+                </a:lnTo>
+                <a:lnTo>
+                  <a:pt x="837590" y="1420978"/>
+                </a:lnTo>
+                <a:lnTo>
+                  <a:pt x="857707" y="1398118"/>
+                </a:lnTo>
+                <a:lnTo>
+                  <a:pt x="876910" y="1376172"/>
+                </a:lnTo>
+                <a:lnTo>
+                  <a:pt x="896112" y="1353312"/>
+                </a:lnTo>
+                <a:lnTo>
+                  <a:pt x="916229" y="1331366"/>
+                </a:lnTo>
+                <a:lnTo>
+                  <a:pt x="935431" y="1309421"/>
+                </a:lnTo>
+                <a:lnTo>
+                  <a:pt x="954634" y="1286561"/>
+                </a:lnTo>
+                <a:lnTo>
+                  <a:pt x="974750" y="1265530"/>
+                </a:lnTo>
+                <a:lnTo>
+                  <a:pt x="993953" y="1243584"/>
+                </a:lnTo>
+                <a:lnTo>
+                  <a:pt x="1013155" y="1221638"/>
+                </a:lnTo>
+                <a:lnTo>
+                  <a:pt x="1033272" y="1200607"/>
+                </a:lnTo>
+                <a:lnTo>
+                  <a:pt x="1052474" y="1179576"/>
+                </a:lnTo>
+                <a:lnTo>
+                  <a:pt x="1071677" y="1158545"/>
+                </a:lnTo>
+                <a:lnTo>
+                  <a:pt x="1091794" y="1137514"/>
+                </a:lnTo>
+                <a:lnTo>
+                  <a:pt x="1110996" y="1116482"/>
+                </a:lnTo>
+                <a:lnTo>
+                  <a:pt x="1130198" y="1096366"/>
+                </a:lnTo>
+                <a:lnTo>
+                  <a:pt x="1149401" y="1076249"/>
+                </a:lnTo>
+                <a:lnTo>
+                  <a:pt x="1169518" y="1056132"/>
+                </a:lnTo>
+                <a:lnTo>
+                  <a:pt x="1188720" y="1036015"/>
+                </a:lnTo>
+                <a:lnTo>
+                  <a:pt x="1207922" y="1015898"/>
+                </a:lnTo>
+                <a:lnTo>
+                  <a:pt x="1228039" y="996696"/>
+                </a:lnTo>
+                <a:lnTo>
+                  <a:pt x="1247242" y="977494"/>
+                </a:lnTo>
+                <a:lnTo>
+                  <a:pt x="1266444" y="958291"/>
+                </a:lnTo>
+                <a:lnTo>
+                  <a:pt x="1286561" y="939089"/>
+                </a:lnTo>
+                <a:lnTo>
+                  <a:pt x="1305763" y="919886"/>
+                </a:lnTo>
+                <a:lnTo>
+                  <a:pt x="1324966" y="901598"/>
+                </a:lnTo>
+                <a:lnTo>
+                  <a:pt x="1345082" y="883310"/>
+                </a:lnTo>
+                <a:lnTo>
+                  <a:pt x="1364285" y="865022"/>
+                </a:lnTo>
+                <a:lnTo>
+                  <a:pt x="1383487" y="846734"/>
+                </a:lnTo>
+                <a:lnTo>
+                  <a:pt x="1403604" y="829361"/>
+                </a:lnTo>
+                <a:lnTo>
+                  <a:pt x="1422806" y="811987"/>
+                </a:lnTo>
+                <a:lnTo>
+                  <a:pt x="1442009" y="794614"/>
+                </a:lnTo>
+                <a:lnTo>
+                  <a:pt x="1461211" y="777240"/>
+                </a:lnTo>
+                <a:lnTo>
+                  <a:pt x="1481328" y="760781"/>
+                </a:lnTo>
+                <a:lnTo>
+                  <a:pt x="1500530" y="744322"/>
+                </a:lnTo>
+                <a:lnTo>
+                  <a:pt x="1519733" y="727862"/>
+                </a:lnTo>
+                <a:lnTo>
+                  <a:pt x="1539850" y="711403"/>
+                </a:lnTo>
+                <a:lnTo>
+                  <a:pt x="1559052" y="694944"/>
+                </a:lnTo>
+                <a:lnTo>
+                  <a:pt x="1578254" y="679399"/>
+                </a:lnTo>
+                <a:lnTo>
+                  <a:pt x="1598371" y="663854"/>
+                </a:lnTo>
+                <a:lnTo>
+                  <a:pt x="1617574" y="648310"/>
+                </a:lnTo>
+                <a:lnTo>
+                  <a:pt x="1636776" y="633679"/>
+                </a:lnTo>
+                <a:lnTo>
+                  <a:pt x="1656893" y="618134"/>
+                </a:lnTo>
+                <a:lnTo>
+                  <a:pt x="1676095" y="603504"/>
+                </a:lnTo>
+                <a:lnTo>
+                  <a:pt x="1695298" y="588874"/>
+                </a:lnTo>
+                <a:lnTo>
+                  <a:pt x="1715414" y="575158"/>
+                </a:lnTo>
+                <a:lnTo>
+                  <a:pt x="1734617" y="560527"/>
+                </a:lnTo>
+                <a:lnTo>
+                  <a:pt x="1753819" y="546811"/>
+                </a:lnTo>
+                <a:lnTo>
+                  <a:pt x="1773022" y="533095"/>
+                </a:lnTo>
+                <a:lnTo>
+                  <a:pt x="1793138" y="519379"/>
+                </a:lnTo>
+                <a:lnTo>
+                  <a:pt x="1812341" y="506578"/>
+                </a:lnTo>
+                <a:lnTo>
+                  <a:pt x="1831543" y="492862"/>
+                </a:lnTo>
+                <a:lnTo>
+                  <a:pt x="1851660" y="480060"/>
+                </a:lnTo>
+                <a:lnTo>
+                  <a:pt x="1870862" y="468173"/>
+                </a:lnTo>
+                <a:lnTo>
+                  <a:pt x="1890065" y="455371"/>
+                </a:lnTo>
+                <a:lnTo>
+                  <a:pt x="1910182" y="442570"/>
+                </a:lnTo>
+                <a:lnTo>
+                  <a:pt x="1929384" y="430682"/>
+                </a:lnTo>
+                <a:lnTo>
+                  <a:pt x="1948586" y="418795"/>
+                </a:lnTo>
+                <a:lnTo>
+                  <a:pt x="1968703" y="407822"/>
+                </a:lnTo>
+                <a:lnTo>
+                  <a:pt x="1987906" y="395935"/>
+                </a:lnTo>
+                <a:lnTo>
+                  <a:pt x="2007108" y="384962"/>
+                </a:lnTo>
+                <a:lnTo>
+                  <a:pt x="2027225" y="373990"/>
+                </a:lnTo>
+                <a:lnTo>
+                  <a:pt x="2046427" y="363017"/>
+                </a:lnTo>
+                <a:lnTo>
+                  <a:pt x="2065630" y="352044"/>
+                </a:lnTo>
+                <a:lnTo>
+                  <a:pt x="2084832" y="341071"/>
+                </a:lnTo>
+                <a:lnTo>
+                  <a:pt x="2104949" y="331013"/>
+                </a:lnTo>
+                <a:lnTo>
+                  <a:pt x="2124151" y="320954"/>
+                </a:lnTo>
+                <a:lnTo>
+                  <a:pt x="2143354" y="310896"/>
+                </a:lnTo>
+                <a:lnTo>
+                  <a:pt x="2163470" y="300838"/>
+                </a:lnTo>
+                <a:lnTo>
+                  <a:pt x="2182673" y="291694"/>
+                </a:lnTo>
+                <a:lnTo>
+                  <a:pt x="2201875" y="282550"/>
+                </a:lnTo>
+                <a:lnTo>
+                  <a:pt x="2221992" y="272491"/>
+                </a:lnTo>
+                <a:lnTo>
+                  <a:pt x="2241194" y="263347"/>
+                </a:lnTo>
+                <a:lnTo>
+                  <a:pt x="2260397" y="255118"/>
+                </a:lnTo>
+                <a:lnTo>
+                  <a:pt x="2280514" y="245974"/>
+                </a:lnTo>
+                <a:lnTo>
+                  <a:pt x="2299716" y="237744"/>
+                </a:lnTo>
+                <a:lnTo>
+                  <a:pt x="2318918" y="228600"/>
+                </a:lnTo>
+                <a:lnTo>
+                  <a:pt x="2339035" y="220370"/>
+                </a:lnTo>
+                <a:lnTo>
+                  <a:pt x="2358238" y="213055"/>
+                </a:lnTo>
+                <a:lnTo>
+                  <a:pt x="2377440" y="204826"/>
+                </a:lnTo>
+                <a:lnTo>
+                  <a:pt x="2396642" y="196596"/>
+                </a:lnTo>
+                <a:lnTo>
+                  <a:pt x="2416759" y="189281"/>
+                </a:lnTo>
+                <a:lnTo>
+                  <a:pt x="2435962" y="181966"/>
+                </a:lnTo>
+                <a:lnTo>
+                  <a:pt x="2455164" y="174650"/>
+                </a:lnTo>
+                <a:lnTo>
+                  <a:pt x="2475281" y="167335"/>
+                </a:lnTo>
+                <a:lnTo>
+                  <a:pt x="2494483" y="160020"/>
+                </a:lnTo>
+                <a:lnTo>
+                  <a:pt x="2513686" y="153619"/>
+                </a:lnTo>
+                <a:lnTo>
+                  <a:pt x="2533802" y="146304"/>
+                </a:lnTo>
+                <a:lnTo>
+                  <a:pt x="2553005" y="139903"/>
+                </a:lnTo>
+                <a:lnTo>
+                  <a:pt x="2572207" y="133502"/>
+                </a:lnTo>
+                <a:lnTo>
+                  <a:pt x="2592324" y="127102"/>
+                </a:lnTo>
+                <a:lnTo>
+                  <a:pt x="2611526" y="120701"/>
+                </a:lnTo>
+                <a:lnTo>
+                  <a:pt x="2630729" y="115214"/>
+                </a:lnTo>
+                <a:lnTo>
+                  <a:pt x="2650846" y="108814"/>
+                </a:lnTo>
+                <a:lnTo>
+                  <a:pt x="2670048" y="103327"/>
+                </a:lnTo>
+                <a:lnTo>
+                  <a:pt x="2689250" y="97841"/>
+                </a:lnTo>
+                <a:lnTo>
+                  <a:pt x="2708453" y="91440"/>
+                </a:lnTo>
+                <a:lnTo>
+                  <a:pt x="2728570" y="85954"/>
+                </a:lnTo>
+                <a:lnTo>
+                  <a:pt x="2747772" y="81382"/>
+                </a:lnTo>
+                <a:lnTo>
+                  <a:pt x="2766974" y="75895"/>
+                </a:lnTo>
+                <a:lnTo>
+                  <a:pt x="2787091" y="70409"/>
+                </a:lnTo>
+                <a:lnTo>
+                  <a:pt x="2806294" y="65837"/>
+                </a:lnTo>
+                <a:lnTo>
+                  <a:pt x="2825496" y="61265"/>
+                </a:lnTo>
+                <a:lnTo>
+                  <a:pt x="2845613" y="55778"/>
+                </a:lnTo>
+                <a:lnTo>
+                  <a:pt x="2864815" y="51206"/>
+                </a:lnTo>
+                <a:lnTo>
+                  <a:pt x="2884018" y="46634"/>
+                </a:lnTo>
+                <a:lnTo>
+                  <a:pt x="2904134" y="42062"/>
+                </a:lnTo>
+                <a:lnTo>
+                  <a:pt x="2923337" y="38405"/>
+                </a:lnTo>
+                <a:lnTo>
+                  <a:pt x="2942539" y="33833"/>
+                </a:lnTo>
+                <a:lnTo>
+                  <a:pt x="2962656" y="30175"/>
+                </a:lnTo>
+                <a:lnTo>
+                  <a:pt x="2981858" y="25603"/>
+                </a:lnTo>
+                <a:lnTo>
+                  <a:pt x="3001061" y="21946"/>
+                </a:lnTo>
+                <a:lnTo>
+                  <a:pt x="3020263" y="18288"/>
                 </a:lnTo>
                 <a:lnTo>
                   <a:pt x="3040380" y="14630"/>
                 </a:lnTo>
                 <a:lnTo>
-                  <a:pt x="3059582" y="10973"/>
+                  <a:pt x="3059582" y="10058"/>
                 </a:lnTo>
                 <a:lnTo>
                   <a:pt x="3078785" y="7315"/>
@@ -8116,8 +8233,8 @@
         </p:nvSpPr>
         <p:spPr>
           <a:xfrm>
-            <a:off x="950976" y="4453128"/>
-            <a:ext cx="3118104" cy="466344"/>
+            <a:off x="950976" y="4478731"/>
+            <a:ext cx="3118104" cy="440741"/>
           </a:xfrm>
           <a:custGeom>
             <a:avLst/>
@@ -8126,414 +8243,414 @@
             <a:cxnLst/>
             <a:rect l="l" t="t" r="r" b="b"/>
             <a:pathLst>
-              <a:path w="3118104" h="466344">
+              <a:path w="3118104" h="440741">
                 <a:moveTo>
-                  <a:pt x="0" y="466344"/>
+                  <a:pt x="0" y="440741"/>
                 </a:moveTo>
                 <a:lnTo>
-                  <a:pt x="19202" y="448056"/>
-                </a:lnTo>
-                <a:lnTo>
-                  <a:pt x="39319" y="434340"/>
-                </a:lnTo>
-                <a:lnTo>
-                  <a:pt x="58522" y="422453"/>
-                </a:lnTo>
-                <a:lnTo>
-                  <a:pt x="77724" y="411480"/>
-                </a:lnTo>
-                <a:lnTo>
-                  <a:pt x="97841" y="400507"/>
-                </a:lnTo>
-                <a:lnTo>
-                  <a:pt x="117043" y="391363"/>
-                </a:lnTo>
-                <a:lnTo>
-                  <a:pt x="136246" y="382219"/>
-                </a:lnTo>
-                <a:lnTo>
-                  <a:pt x="156362" y="373075"/>
-                </a:lnTo>
-                <a:lnTo>
-                  <a:pt x="175565" y="363931"/>
-                </a:lnTo>
-                <a:lnTo>
-                  <a:pt x="194767" y="355702"/>
-                </a:lnTo>
-                <a:lnTo>
-                  <a:pt x="213970" y="348386"/>
-                </a:lnTo>
-                <a:lnTo>
-                  <a:pt x="234086" y="340157"/>
-                </a:lnTo>
-                <a:lnTo>
-                  <a:pt x="253289" y="332842"/>
-                </a:lnTo>
-                <a:lnTo>
-                  <a:pt x="272491" y="325526"/>
-                </a:lnTo>
-                <a:lnTo>
-                  <a:pt x="292608" y="318211"/>
-                </a:lnTo>
-                <a:lnTo>
-                  <a:pt x="311810" y="311810"/>
-                </a:lnTo>
-                <a:lnTo>
-                  <a:pt x="331013" y="305410"/>
-                </a:lnTo>
-                <a:lnTo>
-                  <a:pt x="351130" y="299009"/>
-                </a:lnTo>
-                <a:lnTo>
-                  <a:pt x="370332" y="292608"/>
-                </a:lnTo>
-                <a:lnTo>
-                  <a:pt x="389534" y="286207"/>
-                </a:lnTo>
-                <a:lnTo>
-                  <a:pt x="409651" y="279806"/>
-                </a:lnTo>
-                <a:lnTo>
-                  <a:pt x="428854" y="274320"/>
-                </a:lnTo>
-                <a:lnTo>
-                  <a:pt x="448056" y="268834"/>
-                </a:lnTo>
-                <a:lnTo>
-                  <a:pt x="467258" y="263347"/>
-                </a:lnTo>
-                <a:lnTo>
-                  <a:pt x="487375" y="257861"/>
-                </a:lnTo>
-                <a:lnTo>
-                  <a:pt x="506578" y="252374"/>
-                </a:lnTo>
-                <a:lnTo>
-                  <a:pt x="525780" y="246888"/>
-                </a:lnTo>
-                <a:lnTo>
-                  <a:pt x="545897" y="242316"/>
-                </a:lnTo>
-                <a:lnTo>
-                  <a:pt x="565099" y="236830"/>
-                </a:lnTo>
-                <a:lnTo>
-                  <a:pt x="584302" y="232258"/>
-                </a:lnTo>
-                <a:lnTo>
-                  <a:pt x="604418" y="227686"/>
-                </a:lnTo>
-                <a:lnTo>
-                  <a:pt x="623621" y="223114"/>
-                </a:lnTo>
-                <a:lnTo>
-                  <a:pt x="642823" y="218542"/>
-                </a:lnTo>
-                <a:lnTo>
-                  <a:pt x="662940" y="213970"/>
-                </a:lnTo>
-                <a:lnTo>
-                  <a:pt x="682142" y="209398"/>
-                </a:lnTo>
-                <a:lnTo>
-                  <a:pt x="701345" y="204826"/>
-                </a:lnTo>
-                <a:lnTo>
-                  <a:pt x="721462" y="201168"/>
-                </a:lnTo>
-                <a:lnTo>
-                  <a:pt x="740664" y="196596"/>
-                </a:lnTo>
-                <a:lnTo>
-                  <a:pt x="759866" y="192938"/>
-                </a:lnTo>
-                <a:lnTo>
-                  <a:pt x="779983" y="188366"/>
-                </a:lnTo>
-                <a:lnTo>
-                  <a:pt x="799186" y="184709"/>
-                </a:lnTo>
-                <a:lnTo>
-                  <a:pt x="818388" y="181051"/>
-                </a:lnTo>
-                <a:lnTo>
-                  <a:pt x="837590" y="177394"/>
-                </a:lnTo>
-                <a:lnTo>
-                  <a:pt x="857707" y="173736"/>
-                </a:lnTo>
-                <a:lnTo>
-                  <a:pt x="876910" y="170078"/>
-                </a:lnTo>
-                <a:lnTo>
-                  <a:pt x="896112" y="166421"/>
-                </a:lnTo>
-                <a:lnTo>
-                  <a:pt x="916229" y="162763"/>
-                </a:lnTo>
-                <a:lnTo>
-                  <a:pt x="935431" y="160020"/>
-                </a:lnTo>
-                <a:lnTo>
-                  <a:pt x="954634" y="156362"/>
-                </a:lnTo>
-                <a:lnTo>
-                  <a:pt x="974750" y="153619"/>
-                </a:lnTo>
-                <a:lnTo>
-                  <a:pt x="993953" y="149962"/>
-                </a:lnTo>
-                <a:lnTo>
-                  <a:pt x="1013155" y="147218"/>
-                </a:lnTo>
-                <a:lnTo>
-                  <a:pt x="1033272" y="143561"/>
-                </a:lnTo>
-                <a:lnTo>
-                  <a:pt x="1052474" y="140818"/>
-                </a:lnTo>
-                <a:lnTo>
-                  <a:pt x="1071677" y="138074"/>
-                </a:lnTo>
-                <a:lnTo>
-                  <a:pt x="1091794" y="135331"/>
-                </a:lnTo>
-                <a:lnTo>
-                  <a:pt x="1110996" y="132588"/>
-                </a:lnTo>
-                <a:lnTo>
-                  <a:pt x="1130198" y="129845"/>
-                </a:lnTo>
-                <a:lnTo>
-                  <a:pt x="1149401" y="127102"/>
-                </a:lnTo>
-                <a:lnTo>
-                  <a:pt x="1169518" y="124358"/>
-                </a:lnTo>
-                <a:lnTo>
-                  <a:pt x="1188720" y="121615"/>
-                </a:lnTo>
-                <a:lnTo>
-                  <a:pt x="1207922" y="118872"/>
-                </a:lnTo>
-                <a:lnTo>
-                  <a:pt x="1228039" y="116129"/>
-                </a:lnTo>
-                <a:lnTo>
-                  <a:pt x="1247242" y="113386"/>
-                </a:lnTo>
-                <a:lnTo>
-                  <a:pt x="1266444" y="111557"/>
-                </a:lnTo>
-                <a:lnTo>
-                  <a:pt x="1286561" y="108814"/>
-                </a:lnTo>
-                <a:lnTo>
-                  <a:pt x="1305763" y="106985"/>
-                </a:lnTo>
-                <a:lnTo>
-                  <a:pt x="1324966" y="104242"/>
-                </a:lnTo>
-                <a:lnTo>
-                  <a:pt x="1345082" y="102413"/>
-                </a:lnTo>
-                <a:lnTo>
-                  <a:pt x="1364285" y="99670"/>
-                </a:lnTo>
-                <a:lnTo>
-                  <a:pt x="1383487" y="97841"/>
-                </a:lnTo>
-                <a:lnTo>
-                  <a:pt x="1403604" y="95098"/>
-                </a:lnTo>
-                <a:lnTo>
-                  <a:pt x="1422806" y="93269"/>
-                </a:lnTo>
-                <a:lnTo>
-                  <a:pt x="1442009" y="91440"/>
-                </a:lnTo>
-                <a:lnTo>
-                  <a:pt x="1461211" y="89611"/>
-                </a:lnTo>
-                <a:lnTo>
-                  <a:pt x="1481328" y="86868"/>
-                </a:lnTo>
-                <a:lnTo>
-                  <a:pt x="1500530" y="85039"/>
-                </a:lnTo>
-                <a:lnTo>
-                  <a:pt x="1519733" y="83210"/>
-                </a:lnTo>
-                <a:lnTo>
-                  <a:pt x="1539850" y="81382"/>
-                </a:lnTo>
-                <a:lnTo>
-                  <a:pt x="1559052" y="79553"/>
-                </a:lnTo>
-                <a:lnTo>
-                  <a:pt x="1578254" y="77724"/>
-                </a:lnTo>
-                <a:lnTo>
-                  <a:pt x="1598371" y="75895"/>
-                </a:lnTo>
-                <a:lnTo>
-                  <a:pt x="1617574" y="74066"/>
-                </a:lnTo>
-                <a:lnTo>
-                  <a:pt x="1636776" y="72238"/>
-                </a:lnTo>
-                <a:lnTo>
-                  <a:pt x="1656893" y="70409"/>
-                </a:lnTo>
-                <a:lnTo>
-                  <a:pt x="1676095" y="69494"/>
-                </a:lnTo>
-                <a:lnTo>
-                  <a:pt x="1695298" y="67666"/>
-                </a:lnTo>
-                <a:lnTo>
-                  <a:pt x="1715414" y="65837"/>
-                </a:lnTo>
-                <a:lnTo>
-                  <a:pt x="1734617" y="64008"/>
-                </a:lnTo>
-                <a:lnTo>
-                  <a:pt x="1753819" y="63094"/>
-                </a:lnTo>
-                <a:lnTo>
-                  <a:pt x="1773022" y="61265"/>
-                </a:lnTo>
-                <a:lnTo>
-                  <a:pt x="1793138" y="59436"/>
-                </a:lnTo>
-                <a:lnTo>
-                  <a:pt x="1812341" y="58522"/>
-                </a:lnTo>
-                <a:lnTo>
-                  <a:pt x="1831543" y="56693"/>
-                </a:lnTo>
-                <a:lnTo>
-                  <a:pt x="1851660" y="54864"/>
-                </a:lnTo>
-                <a:lnTo>
-                  <a:pt x="1870862" y="53950"/>
-                </a:lnTo>
-                <a:lnTo>
-                  <a:pt x="1890065" y="52121"/>
-                </a:lnTo>
-                <a:lnTo>
-                  <a:pt x="1910182" y="51206"/>
-                </a:lnTo>
-                <a:lnTo>
-                  <a:pt x="1929384" y="49378"/>
-                </a:lnTo>
-                <a:lnTo>
-                  <a:pt x="1948586" y="48463"/>
-                </a:lnTo>
-                <a:lnTo>
-                  <a:pt x="1968703" y="47549"/>
-                </a:lnTo>
-                <a:lnTo>
-                  <a:pt x="1987906" y="45720"/>
-                </a:lnTo>
-                <a:lnTo>
-                  <a:pt x="2007108" y="44806"/>
-                </a:lnTo>
-                <a:lnTo>
-                  <a:pt x="2027225" y="43891"/>
-                </a:lnTo>
-                <a:lnTo>
-                  <a:pt x="2046427" y="42062"/>
-                </a:lnTo>
-                <a:lnTo>
-                  <a:pt x="2065630" y="41148"/>
-                </a:lnTo>
-                <a:lnTo>
-                  <a:pt x="2084832" y="40234"/>
-                </a:lnTo>
-                <a:lnTo>
-                  <a:pt x="2104949" y="38405"/>
-                </a:lnTo>
-                <a:lnTo>
-                  <a:pt x="2124151" y="37490"/>
-                </a:lnTo>
-                <a:lnTo>
-                  <a:pt x="2143354" y="36576"/>
-                </a:lnTo>
-                <a:lnTo>
-                  <a:pt x="2163470" y="35662"/>
-                </a:lnTo>
-                <a:lnTo>
-                  <a:pt x="2182673" y="34747"/>
-                </a:lnTo>
-                <a:lnTo>
-                  <a:pt x="2201875" y="33833"/>
-                </a:lnTo>
-                <a:lnTo>
-                  <a:pt x="2221992" y="32004"/>
-                </a:lnTo>
-                <a:lnTo>
-                  <a:pt x="2241194" y="31090"/>
-                </a:lnTo>
-                <a:lnTo>
-                  <a:pt x="2260397" y="30175"/>
-                </a:lnTo>
-                <a:lnTo>
-                  <a:pt x="2280514" y="29261"/>
-                </a:lnTo>
-                <a:lnTo>
-                  <a:pt x="2299716" y="28346"/>
-                </a:lnTo>
-                <a:lnTo>
-                  <a:pt x="2318918" y="27432"/>
-                </a:lnTo>
-                <a:lnTo>
-                  <a:pt x="2339035" y="26518"/>
-                </a:lnTo>
-                <a:lnTo>
-                  <a:pt x="2358238" y="25603"/>
-                </a:lnTo>
-                <a:lnTo>
-                  <a:pt x="2377440" y="24689"/>
-                </a:lnTo>
-                <a:lnTo>
-                  <a:pt x="2396642" y="23774"/>
-                </a:lnTo>
-                <a:lnTo>
-                  <a:pt x="2416759" y="22860"/>
-                </a:lnTo>
-                <a:lnTo>
-                  <a:pt x="2435962" y="21946"/>
-                </a:lnTo>
-                <a:lnTo>
-                  <a:pt x="2455164" y="21031"/>
+                  <a:pt x="19202" y="423367"/>
+                </a:lnTo>
+                <a:lnTo>
+                  <a:pt x="39319" y="410566"/>
+                </a:lnTo>
+                <a:lnTo>
+                  <a:pt x="58522" y="398678"/>
+                </a:lnTo>
+                <a:lnTo>
+                  <a:pt x="77724" y="388620"/>
+                </a:lnTo>
+                <a:lnTo>
+                  <a:pt x="97841" y="378562"/>
+                </a:lnTo>
+                <a:lnTo>
+                  <a:pt x="117043" y="369418"/>
+                </a:lnTo>
+                <a:lnTo>
+                  <a:pt x="136246" y="361188"/>
+                </a:lnTo>
+                <a:lnTo>
+                  <a:pt x="156362" y="352044"/>
+                </a:lnTo>
+                <a:lnTo>
+                  <a:pt x="175565" y="344729"/>
+                </a:lnTo>
+                <a:lnTo>
+                  <a:pt x="194767" y="336499"/>
+                </a:lnTo>
+                <a:lnTo>
+                  <a:pt x="213970" y="329184"/>
+                </a:lnTo>
+                <a:lnTo>
+                  <a:pt x="234086" y="321869"/>
+                </a:lnTo>
+                <a:lnTo>
+                  <a:pt x="253289" y="314554"/>
+                </a:lnTo>
+                <a:lnTo>
+                  <a:pt x="272491" y="308153"/>
+                </a:lnTo>
+                <a:lnTo>
+                  <a:pt x="292608" y="300838"/>
+                </a:lnTo>
+                <a:lnTo>
+                  <a:pt x="311810" y="294437"/>
+                </a:lnTo>
+                <a:lnTo>
+                  <a:pt x="331013" y="288036"/>
+                </a:lnTo>
+                <a:lnTo>
+                  <a:pt x="351130" y="282550"/>
+                </a:lnTo>
+                <a:lnTo>
+                  <a:pt x="370332" y="276149"/>
+                </a:lnTo>
+                <a:lnTo>
+                  <a:pt x="389534" y="270662"/>
+                </a:lnTo>
+                <a:lnTo>
+                  <a:pt x="409651" y="265176"/>
+                </a:lnTo>
+                <a:lnTo>
+                  <a:pt x="428854" y="259690"/>
+                </a:lnTo>
+                <a:lnTo>
+                  <a:pt x="448056" y="254203"/>
+                </a:lnTo>
+                <a:lnTo>
+                  <a:pt x="467258" y="248717"/>
+                </a:lnTo>
+                <a:lnTo>
+                  <a:pt x="487375" y="243230"/>
+                </a:lnTo>
+                <a:lnTo>
+                  <a:pt x="506578" y="238658"/>
+                </a:lnTo>
+                <a:lnTo>
+                  <a:pt x="525780" y="233172"/>
+                </a:lnTo>
+                <a:lnTo>
+                  <a:pt x="545897" y="228600"/>
+                </a:lnTo>
+                <a:lnTo>
+                  <a:pt x="565099" y="224028"/>
+                </a:lnTo>
+                <a:lnTo>
+                  <a:pt x="584302" y="219456"/>
+                </a:lnTo>
+                <a:lnTo>
+                  <a:pt x="604418" y="214884"/>
+                </a:lnTo>
+                <a:lnTo>
+                  <a:pt x="623621" y="210312"/>
+                </a:lnTo>
+                <a:lnTo>
+                  <a:pt x="642823" y="206654"/>
+                </a:lnTo>
+                <a:lnTo>
+                  <a:pt x="662940" y="202082"/>
+                </a:lnTo>
+                <a:lnTo>
+                  <a:pt x="682142" y="197510"/>
+                </a:lnTo>
+                <a:lnTo>
+                  <a:pt x="701345" y="193853"/>
+                </a:lnTo>
+                <a:lnTo>
+                  <a:pt x="721462" y="190195"/>
+                </a:lnTo>
+                <a:lnTo>
+                  <a:pt x="740664" y="185623"/>
+                </a:lnTo>
+                <a:lnTo>
+                  <a:pt x="759866" y="181966"/>
+                </a:lnTo>
+                <a:lnTo>
+                  <a:pt x="779983" y="178308"/>
+                </a:lnTo>
+                <a:lnTo>
+                  <a:pt x="799186" y="174650"/>
+                </a:lnTo>
+                <a:lnTo>
+                  <a:pt x="818388" y="170993"/>
+                </a:lnTo>
+                <a:lnTo>
+                  <a:pt x="837590" y="167335"/>
+                </a:lnTo>
+                <a:lnTo>
+                  <a:pt x="857707" y="164592"/>
+                </a:lnTo>
+                <a:lnTo>
+                  <a:pt x="876910" y="160934"/>
+                </a:lnTo>
+                <a:lnTo>
+                  <a:pt x="896112" y="157277"/>
+                </a:lnTo>
+                <a:lnTo>
+                  <a:pt x="916229" y="154534"/>
+                </a:lnTo>
+                <a:lnTo>
+                  <a:pt x="935431" y="150876"/>
+                </a:lnTo>
+                <a:lnTo>
+                  <a:pt x="954634" y="148133"/>
+                </a:lnTo>
+                <a:lnTo>
+                  <a:pt x="974750" y="145390"/>
+                </a:lnTo>
+                <a:lnTo>
+                  <a:pt x="993953" y="141732"/>
+                </a:lnTo>
+                <a:lnTo>
+                  <a:pt x="1013155" y="138989"/>
+                </a:lnTo>
+                <a:lnTo>
+                  <a:pt x="1033272" y="136246"/>
+                </a:lnTo>
+                <a:lnTo>
+                  <a:pt x="1052474" y="133502"/>
+                </a:lnTo>
+                <a:lnTo>
+                  <a:pt x="1071677" y="130759"/>
+                </a:lnTo>
+                <a:lnTo>
+                  <a:pt x="1091794" y="128016"/>
+                </a:lnTo>
+                <a:lnTo>
+                  <a:pt x="1110996" y="125273"/>
+                </a:lnTo>
+                <a:lnTo>
+                  <a:pt x="1130198" y="122530"/>
+                </a:lnTo>
+                <a:lnTo>
+                  <a:pt x="1149401" y="119786"/>
+                </a:lnTo>
+                <a:lnTo>
+                  <a:pt x="1169518" y="117043"/>
+                </a:lnTo>
+                <a:lnTo>
+                  <a:pt x="1188720" y="115214"/>
+                </a:lnTo>
+                <a:lnTo>
+                  <a:pt x="1207922" y="112471"/>
+                </a:lnTo>
+                <a:lnTo>
+                  <a:pt x="1228039" y="109728"/>
+                </a:lnTo>
+                <a:lnTo>
+                  <a:pt x="1247242" y="107899"/>
+                </a:lnTo>
+                <a:lnTo>
+                  <a:pt x="1266444" y="105156"/>
+                </a:lnTo>
+                <a:lnTo>
+                  <a:pt x="1286561" y="103327"/>
+                </a:lnTo>
+                <a:lnTo>
+                  <a:pt x="1305763" y="100584"/>
+                </a:lnTo>
+                <a:lnTo>
+                  <a:pt x="1324966" y="98755"/>
+                </a:lnTo>
+                <a:lnTo>
+                  <a:pt x="1345082" y="96926"/>
+                </a:lnTo>
+                <a:lnTo>
+                  <a:pt x="1364285" y="94183"/>
+                </a:lnTo>
+                <a:lnTo>
+                  <a:pt x="1383487" y="92354"/>
+                </a:lnTo>
+                <a:lnTo>
+                  <a:pt x="1403604" y="90526"/>
+                </a:lnTo>
+                <a:lnTo>
+                  <a:pt x="1422806" y="88697"/>
+                </a:lnTo>
+                <a:lnTo>
+                  <a:pt x="1442009" y="86868"/>
+                </a:lnTo>
+                <a:lnTo>
+                  <a:pt x="1461211" y="85039"/>
+                </a:lnTo>
+                <a:lnTo>
+                  <a:pt x="1481328" y="82296"/>
+                </a:lnTo>
+                <a:lnTo>
+                  <a:pt x="1500530" y="80467"/>
+                </a:lnTo>
+                <a:lnTo>
+                  <a:pt x="1519733" y="78638"/>
+                </a:lnTo>
+                <a:lnTo>
+                  <a:pt x="1539850" y="76810"/>
+                </a:lnTo>
+                <a:lnTo>
+                  <a:pt x="1559052" y="75895"/>
+                </a:lnTo>
+                <a:lnTo>
+                  <a:pt x="1578254" y="74066"/>
+                </a:lnTo>
+                <a:lnTo>
+                  <a:pt x="1598371" y="72238"/>
+                </a:lnTo>
+                <a:lnTo>
+                  <a:pt x="1617574" y="70409"/>
+                </a:lnTo>
+                <a:lnTo>
+                  <a:pt x="1636776" y="68580"/>
+                </a:lnTo>
+                <a:lnTo>
+                  <a:pt x="1656893" y="66751"/>
+                </a:lnTo>
+                <a:lnTo>
+                  <a:pt x="1676095" y="65837"/>
+                </a:lnTo>
+                <a:lnTo>
+                  <a:pt x="1695298" y="64008"/>
+                </a:lnTo>
+                <a:lnTo>
+                  <a:pt x="1715414" y="62179"/>
+                </a:lnTo>
+                <a:lnTo>
+                  <a:pt x="1734617" y="61265"/>
+                </a:lnTo>
+                <a:lnTo>
+                  <a:pt x="1753819" y="59436"/>
+                </a:lnTo>
+                <a:lnTo>
+                  <a:pt x="1773022" y="57607"/>
+                </a:lnTo>
+                <a:lnTo>
+                  <a:pt x="1793138" y="56693"/>
+                </a:lnTo>
+                <a:lnTo>
+                  <a:pt x="1812341" y="54864"/>
+                </a:lnTo>
+                <a:lnTo>
+                  <a:pt x="1831543" y="53950"/>
+                </a:lnTo>
+                <a:lnTo>
+                  <a:pt x="1851660" y="52121"/>
+                </a:lnTo>
+                <a:lnTo>
+                  <a:pt x="1870862" y="51206"/>
+                </a:lnTo>
+                <a:lnTo>
+                  <a:pt x="1890065" y="50292"/>
+                </a:lnTo>
+                <a:lnTo>
+                  <a:pt x="1910182" y="48463"/>
+                </a:lnTo>
+                <a:lnTo>
+                  <a:pt x="1929384" y="47549"/>
+                </a:lnTo>
+                <a:lnTo>
+                  <a:pt x="1948586" y="45720"/>
+                </a:lnTo>
+                <a:lnTo>
+                  <a:pt x="1968703" y="44806"/>
+                </a:lnTo>
+                <a:lnTo>
+                  <a:pt x="1987906" y="43891"/>
+                </a:lnTo>
+                <a:lnTo>
+                  <a:pt x="2007108" y="42977"/>
+                </a:lnTo>
+                <a:lnTo>
+                  <a:pt x="2027225" y="41148"/>
+                </a:lnTo>
+                <a:lnTo>
+                  <a:pt x="2046427" y="40234"/>
+                </a:lnTo>
+                <a:lnTo>
+                  <a:pt x="2065630" y="39319"/>
+                </a:lnTo>
+                <a:lnTo>
+                  <a:pt x="2084832" y="38405"/>
+                </a:lnTo>
+                <a:lnTo>
+                  <a:pt x="2104949" y="36576"/>
+                </a:lnTo>
+                <a:lnTo>
+                  <a:pt x="2124151" y="35662"/>
+                </a:lnTo>
+                <a:lnTo>
+                  <a:pt x="2143354" y="34747"/>
+                </a:lnTo>
+                <a:lnTo>
+                  <a:pt x="2163470" y="33833"/>
+                </a:lnTo>
+                <a:lnTo>
+                  <a:pt x="2182673" y="32918"/>
+                </a:lnTo>
+                <a:lnTo>
+                  <a:pt x="2201875" y="32004"/>
+                </a:lnTo>
+                <a:lnTo>
+                  <a:pt x="2221992" y="31090"/>
+                </a:lnTo>
+                <a:lnTo>
+                  <a:pt x="2241194" y="30175"/>
+                </a:lnTo>
+                <a:lnTo>
+                  <a:pt x="2260397" y="29261"/>
+                </a:lnTo>
+                <a:lnTo>
+                  <a:pt x="2280514" y="28346"/>
+                </a:lnTo>
+                <a:lnTo>
+                  <a:pt x="2299716" y="27432"/>
+                </a:lnTo>
+                <a:lnTo>
+                  <a:pt x="2318918" y="26518"/>
+                </a:lnTo>
+                <a:lnTo>
+                  <a:pt x="2339035" y="25603"/>
+                </a:lnTo>
+                <a:lnTo>
+                  <a:pt x="2358238" y="24689"/>
+                </a:lnTo>
+                <a:lnTo>
+                  <a:pt x="2377440" y="23774"/>
+                </a:lnTo>
+                <a:lnTo>
+                  <a:pt x="2396642" y="22860"/>
+                </a:lnTo>
+                <a:lnTo>
+                  <a:pt x="2416759" y="21946"/>
+                </a:lnTo>
+                <a:lnTo>
+                  <a:pt x="2435962" y="21031"/>
+                </a:lnTo>
+                <a:lnTo>
+                  <a:pt x="2455164" y="20117"/>
                 </a:lnTo>
                 <a:lnTo>
                   <a:pt x="2475281" y="20117"/>
                 </a:lnTo>
                 <a:lnTo>
-                  <a:pt x="2494483" y="20117"/>
-                </a:lnTo>
-                <a:lnTo>
-                  <a:pt x="2513686" y="19202"/>
-                </a:lnTo>
-                <a:lnTo>
-                  <a:pt x="2533802" y="18288"/>
-                </a:lnTo>
-                <a:lnTo>
-                  <a:pt x="2553005" y="17374"/>
-                </a:lnTo>
-                <a:lnTo>
-                  <a:pt x="2572207" y="16459"/>
+                  <a:pt x="2494483" y="19202"/>
+                </a:lnTo>
+                <a:lnTo>
+                  <a:pt x="2513686" y="18288"/>
+                </a:lnTo>
+                <a:lnTo>
+                  <a:pt x="2533802" y="17374"/>
+                </a:lnTo>
+                <a:lnTo>
+                  <a:pt x="2553005" y="16459"/>
+                </a:lnTo>
+                <a:lnTo>
+                  <a:pt x="2572207" y="15545"/>
                 </a:lnTo>
                 <a:lnTo>
                   <a:pt x="2592324" y="15545"/>
                 </a:lnTo>
                 <a:lnTo>
-                  <a:pt x="2611526" y="15545"/>
-                </a:lnTo>
-                <a:lnTo>
-                  <a:pt x="2630729" y="14630"/>
+                  <a:pt x="2611526" y="14630"/>
+                </a:lnTo>
+                <a:lnTo>
+                  <a:pt x="2630729" y="13716"/>
                 </a:lnTo>
                 <a:lnTo>
                   <a:pt x="2650846" y="13716"/>
@@ -8542,10 +8659,10 @@
                   <a:pt x="2670048" y="12802"/>
                 </a:lnTo>
                 <a:lnTo>
-                  <a:pt x="2689250" y="12802"/>
-                </a:lnTo>
-                <a:lnTo>
-                  <a:pt x="2708453" y="11887"/>
+                  <a:pt x="2689250" y="11887"/>
+                </a:lnTo>
+                <a:lnTo>
+                  <a:pt x="2708453" y="10973"/>
                 </a:lnTo>
                 <a:lnTo>
                   <a:pt x="2728570" y="10973"/>
@@ -8554,7 +8671,7 @@
                   <a:pt x="2747772" y="10058"/>
                 </a:lnTo>
                 <a:lnTo>
-                  <a:pt x="2766974" y="10058"/>
+                  <a:pt x="2766974" y="9144"/>
                 </a:lnTo>
                 <a:lnTo>
                   <a:pt x="2787091" y="9144"/>
@@ -8563,7 +8680,7 @@
                   <a:pt x="2806294" y="8230"/>
                 </a:lnTo>
                 <a:lnTo>
-                  <a:pt x="2825496" y="8230"/>
+                  <a:pt x="2825496" y="7315"/>
                 </a:lnTo>
                 <a:lnTo>
                   <a:pt x="2845613" y="7315"/>
@@ -8605,7 +8722,7 @@
                   <a:pt x="3078785" y="914"/>
                 </a:lnTo>
                 <a:lnTo>
-                  <a:pt x="3098902" y="0"/>
+                  <a:pt x="3098902" y="914"/>
                 </a:lnTo>
                 <a:lnTo>
                   <a:pt x="3118104" y="0"/>
@@ -9144,8 +9261,8 @@
         </p:nvSpPr>
         <p:spPr>
           <a:xfrm>
-            <a:off x="4389120" y="2240280"/>
-            <a:ext cx="2560320" cy="420624"/>
+            <a:off x="4526280" y="2377440"/>
+            <a:ext cx="2514600" cy="420624"/>
           </a:xfrm>
           <a:prstGeom prst="rect">
             <a:avLst/>
@@ -9183,8 +9300,8 @@
         </p:nvSpPr>
         <p:spPr>
           <a:xfrm>
-            <a:off x="4389120" y="4242816"/>
-            <a:ext cx="2560320" cy="420624"/>
+            <a:off x="4526280" y="4268419"/>
+            <a:ext cx="2514600" cy="420624"/>
           </a:xfrm>
           <a:prstGeom prst="rect">
             <a:avLst/>
@@ -9222,8 +9339,8 @@
         </p:nvSpPr>
         <p:spPr>
           <a:xfrm>
-            <a:off x="4389120" y="4709160"/>
-            <a:ext cx="2560320" cy="420624"/>
+            <a:off x="4526280" y="4709160"/>
+            <a:ext cx="2514600" cy="420624"/>
           </a:xfrm>
           <a:prstGeom prst="rect">
             <a:avLst/>
@@ -9261,7 +9378,7 @@
         </p:nvSpPr>
         <p:spPr>
           <a:xfrm>
-            <a:off x="502920" y="1755648"/>
+            <a:off x="502920" y="1691640"/>
             <a:ext cx="3291840" cy="420624"/>
           </a:xfrm>
           <a:prstGeom prst="rect">
@@ -9339,7 +9456,7 @@
         </p:nvSpPr>
         <p:spPr>
           <a:xfrm>
-            <a:off x="7178040" y="2066544"/>
+            <a:off x="7178040" y="2034540"/>
             <a:ext cx="347472" cy="420624"/>
           </a:xfrm>
           <a:prstGeom prst="rect">
@@ -9378,7 +9495,7 @@
         </p:nvSpPr>
         <p:spPr>
           <a:xfrm>
-            <a:off x="7525512" y="2066544"/>
+            <a:off x="7525512" y="2034540"/>
             <a:ext cx="4160520" cy="841248"/>
           </a:xfrm>
           <a:prstGeom prst="rect">
@@ -9434,7 +9551,7 @@
         </p:nvSpPr>
         <p:spPr>
           <a:xfrm>
-            <a:off x="7178040" y="3319272"/>
+            <a:off x="7178040" y="3287268"/>
             <a:ext cx="347472" cy="420624"/>
           </a:xfrm>
           <a:prstGeom prst="rect">
@@ -9473,7 +9590,7 @@
         </p:nvSpPr>
         <p:spPr>
           <a:xfrm>
-            <a:off x="7525512" y="3319272"/>
+            <a:off x="7525512" y="3287268"/>
             <a:ext cx="4160520" cy="841248"/>
           </a:xfrm>
           <a:prstGeom prst="rect">
@@ -9540,7 +9657,7 @@
         </p:nvSpPr>
         <p:spPr>
           <a:xfrm>
-            <a:off x="7178040" y="4572000"/>
+            <a:off x="7178040" y="4539996"/>
             <a:ext cx="347472" cy="420624"/>
           </a:xfrm>
           <a:prstGeom prst="rect">
@@ -9579,7 +9696,7 @@
         </p:nvSpPr>
         <p:spPr>
           <a:xfrm>
-            <a:off x="7525512" y="4572000"/>
+            <a:off x="7525512" y="4539996"/>
             <a:ext cx="4160520" cy="841248"/>
           </a:xfrm>
           <a:prstGeom prst="rect">
@@ -9756,7 +9873,7 @@
           <a:ln/>
         </p:spPr>
         <p:txBody>
-          <a:bodyPr wrap="square" lIns="0" tIns="0" rIns="0" bIns="0" rtlCol="0" anchor="ctr"/>
+          <a:bodyPr wrap="none" lIns="0" tIns="0" rIns="0" bIns="0" rtlCol="0" anchor="ctr"/>
           <a:lstStyle/>
           <a:p>
             <a:pPr algn="ctr" indent="0" marL="0">
@@ -9799,7 +9916,7 @@
           <a:ln/>
         </p:spPr>
         <p:txBody>
-          <a:bodyPr wrap="square" lIns="0" tIns="0" rIns="0" bIns="0" rtlCol="0" anchor="ctr"/>
+          <a:bodyPr wrap="none" lIns="0" tIns="0" rIns="0" bIns="0" rtlCol="0" anchor="ctr"/>
           <a:lstStyle/>
           <a:p>
             <a:pPr algn="ctr" indent="0" marL="0">
@@ -9842,7 +9959,7 @@
           <a:ln/>
         </p:spPr>
         <p:txBody>
-          <a:bodyPr wrap="square" lIns="0" tIns="0" rIns="0" bIns="0" rtlCol="0" anchor="ctr"/>
+          <a:bodyPr wrap="none" lIns="0" tIns="0" rIns="0" bIns="0" rtlCol="0" anchor="ctr"/>
           <a:lstStyle/>
           <a:p>
             <a:pPr algn="ctr" indent="0" marL="0">
@@ -9885,7 +10002,7 @@
           <a:ln/>
         </p:spPr>
         <p:txBody>
-          <a:bodyPr wrap="square" lIns="0" tIns="0" rIns="0" bIns="0" rtlCol="0" anchor="ctr"/>
+          <a:bodyPr wrap="none" lIns="0" tIns="0" rIns="0" bIns="0" rtlCol="0" anchor="ctr"/>
           <a:lstStyle/>
           <a:p>
             <a:pPr algn="ctr" indent="0" marL="0">
@@ -9928,7 +10045,7 @@
           <a:ln/>
         </p:spPr>
         <p:txBody>
-          <a:bodyPr wrap="square" lIns="0" tIns="0" rIns="0" bIns="0" rtlCol="0" anchor="ctr"/>
+          <a:bodyPr wrap="none" lIns="0" tIns="0" rIns="0" bIns="0" rtlCol="0" anchor="ctr"/>
           <a:lstStyle/>
           <a:p>
             <a:pPr algn="ctr" indent="0" marL="0">
@@ -10035,8 +10152,8 @@
         </p:nvSpPr>
         <p:spPr>
           <a:xfrm>
-            <a:off x="1463040" y="4137660"/>
-            <a:ext cx="4754880" cy="0"/>
+            <a:off x="1600200" y="4116629"/>
+            <a:ext cx="4617720" cy="0"/>
           </a:xfrm>
           <a:prstGeom prst="line">
             <a:avLst/>
@@ -10058,8 +10175,8 @@
         </p:nvSpPr>
         <p:spPr>
           <a:xfrm>
-            <a:off x="1463040" y="3129991"/>
-            <a:ext cx="4754880" cy="0"/>
+            <a:off x="1600200" y="3127248"/>
+            <a:ext cx="4617720" cy="0"/>
           </a:xfrm>
           <a:prstGeom prst="line">
             <a:avLst/>
@@ -10081,7 +10198,795 @@
         </p:nvSpPr>
         <p:spPr>
           <a:xfrm>
-            <a:off x="1463040" y="2845613"/>
+            <a:off x="2553005" y="3020263"/>
+            <a:ext cx="3664915" cy="2195474"/>
+          </a:xfrm>
+          <a:custGeom>
+            <a:avLst/>
+            <a:gdLst/>
+            <a:ahLst/>
+            <a:cxnLst/>
+            <a:rect l="l" t="t" r="r" b="b"/>
+            <a:pathLst>
+              <a:path w="3664915" h="2195474">
+                <a:moveTo>
+                  <a:pt x="0" y="2195474"/>
+                </a:moveTo>
+                <a:lnTo>
+                  <a:pt x="30175" y="2195474"/>
+                </a:lnTo>
+                <a:lnTo>
+                  <a:pt x="61265" y="2195474"/>
+                </a:lnTo>
+                <a:lnTo>
+                  <a:pt x="91440" y="2195474"/>
+                </a:lnTo>
+                <a:lnTo>
+                  <a:pt x="122530" y="2195474"/>
+                </a:lnTo>
+                <a:lnTo>
+                  <a:pt x="152705" y="2195474"/>
+                </a:lnTo>
+                <a:lnTo>
+                  <a:pt x="182880" y="2194560"/>
+                </a:lnTo>
+                <a:lnTo>
+                  <a:pt x="213970" y="2194560"/>
+                </a:lnTo>
+                <a:lnTo>
+                  <a:pt x="244145" y="2194560"/>
+                </a:lnTo>
+                <a:lnTo>
+                  <a:pt x="275234" y="2194560"/>
+                </a:lnTo>
+                <a:lnTo>
+                  <a:pt x="305410" y="2193646"/>
+                </a:lnTo>
+                <a:lnTo>
+                  <a:pt x="335585" y="2193646"/>
+                </a:lnTo>
+                <a:lnTo>
+                  <a:pt x="366674" y="2193646"/>
+                </a:lnTo>
+                <a:lnTo>
+                  <a:pt x="396850" y="2192731"/>
+                </a:lnTo>
+                <a:lnTo>
+                  <a:pt x="427939" y="2192731"/>
+                </a:lnTo>
+                <a:lnTo>
+                  <a:pt x="458114" y="2191817"/>
+                </a:lnTo>
+                <a:lnTo>
+                  <a:pt x="488290" y="2190902"/>
+                </a:lnTo>
+                <a:lnTo>
+                  <a:pt x="519379" y="2190902"/>
+                </a:lnTo>
+                <a:lnTo>
+                  <a:pt x="549554" y="2189988"/>
+                </a:lnTo>
+                <a:lnTo>
+                  <a:pt x="580644" y="2189074"/>
+                </a:lnTo>
+                <a:lnTo>
+                  <a:pt x="610819" y="2188159"/>
+                </a:lnTo>
+                <a:lnTo>
+                  <a:pt x="640994" y="2187245"/>
+                </a:lnTo>
+                <a:lnTo>
+                  <a:pt x="672084" y="2185416"/>
+                </a:lnTo>
+                <a:lnTo>
+                  <a:pt x="702259" y="2184502"/>
+                </a:lnTo>
+                <a:lnTo>
+                  <a:pt x="733349" y="2182673"/>
+                </a:lnTo>
+                <a:lnTo>
+                  <a:pt x="763524" y="2180844"/>
+                </a:lnTo>
+                <a:lnTo>
+                  <a:pt x="793699" y="2179015"/>
+                </a:lnTo>
+                <a:lnTo>
+                  <a:pt x="824789" y="2177186"/>
+                </a:lnTo>
+                <a:lnTo>
+                  <a:pt x="854964" y="2174443"/>
+                </a:lnTo>
+                <a:lnTo>
+                  <a:pt x="886054" y="2171700"/>
+                </a:lnTo>
+                <a:lnTo>
+                  <a:pt x="916229" y="2168957"/>
+                </a:lnTo>
+                <a:lnTo>
+                  <a:pt x="946404" y="2165299"/>
+                </a:lnTo>
+                <a:lnTo>
+                  <a:pt x="977494" y="2161642"/>
+                </a:lnTo>
+                <a:lnTo>
+                  <a:pt x="1007669" y="2157070"/>
+                </a:lnTo>
+                <a:lnTo>
+                  <a:pt x="1038758" y="2151583"/>
+                </a:lnTo>
+                <a:lnTo>
+                  <a:pt x="1068934" y="2146097"/>
+                </a:lnTo>
+                <a:lnTo>
+                  <a:pt x="1099109" y="2139696"/>
+                </a:lnTo>
+                <a:lnTo>
+                  <a:pt x="1130198" y="2133295"/>
+                </a:lnTo>
+                <a:lnTo>
+                  <a:pt x="1160374" y="2125066"/>
+                </a:lnTo>
+                <a:lnTo>
+                  <a:pt x="1191463" y="2115922"/>
+                </a:lnTo>
+                <a:lnTo>
+                  <a:pt x="1221638" y="2105863"/>
+                </a:lnTo>
+                <a:lnTo>
+                  <a:pt x="1251814" y="2094890"/>
+                </a:lnTo>
+                <a:lnTo>
+                  <a:pt x="1282903" y="2083003"/>
+                </a:lnTo>
+                <a:lnTo>
+                  <a:pt x="1313078" y="2069287"/>
+                </a:lnTo>
+                <a:lnTo>
+                  <a:pt x="1344168" y="2053742"/>
+                </a:lnTo>
+                <a:lnTo>
+                  <a:pt x="1374343" y="2036369"/>
+                </a:lnTo>
+                <a:lnTo>
+                  <a:pt x="1404518" y="2017166"/>
+                </a:lnTo>
+                <a:lnTo>
+                  <a:pt x="1435608" y="1996135"/>
+                </a:lnTo>
+                <a:lnTo>
+                  <a:pt x="1465783" y="1973275"/>
+                </a:lnTo>
+                <a:lnTo>
+                  <a:pt x="1496873" y="1947672"/>
+                </a:lnTo>
+                <a:lnTo>
+                  <a:pt x="1527048" y="1920240"/>
+                </a:lnTo>
+                <a:lnTo>
+                  <a:pt x="1557223" y="1889150"/>
+                </a:lnTo>
+                <a:lnTo>
+                  <a:pt x="1588313" y="1856232"/>
+                </a:lnTo>
+                <a:lnTo>
+                  <a:pt x="1618488" y="1819656"/>
+                </a:lnTo>
+                <a:lnTo>
+                  <a:pt x="1649578" y="1780337"/>
+                </a:lnTo>
+                <a:lnTo>
+                  <a:pt x="1679753" y="1737360"/>
+                </a:lnTo>
+                <a:lnTo>
+                  <a:pt x="1709928" y="1691640"/>
+                </a:lnTo>
+                <a:lnTo>
+                  <a:pt x="1741018" y="1643177"/>
+                </a:lnTo>
+                <a:lnTo>
+                  <a:pt x="1771193" y="1591970"/>
+                </a:lnTo>
+                <a:lnTo>
+                  <a:pt x="1802282" y="1537106"/>
+                </a:lnTo>
+                <a:lnTo>
+                  <a:pt x="1832458" y="1479499"/>
+                </a:lnTo>
+                <a:lnTo>
+                  <a:pt x="1862633" y="1420063"/>
+                </a:lnTo>
+                <a:lnTo>
+                  <a:pt x="1893722" y="1357884"/>
+                </a:lnTo>
+                <a:lnTo>
+                  <a:pt x="1923898" y="1294790"/>
+                </a:lnTo>
+                <a:lnTo>
+                  <a:pt x="1954987" y="1229868"/>
+                </a:lnTo>
+                <a:lnTo>
+                  <a:pt x="1985162" y="1163117"/>
+                </a:lnTo>
+                <a:lnTo>
+                  <a:pt x="2015338" y="1096366"/>
+                </a:lnTo>
+                <a:lnTo>
+                  <a:pt x="2046427" y="1030529"/>
+                </a:lnTo>
+                <a:lnTo>
+                  <a:pt x="2076602" y="963778"/>
+                </a:lnTo>
+                <a:lnTo>
+                  <a:pt x="2107692" y="898855"/>
+                </a:lnTo>
+                <a:lnTo>
+                  <a:pt x="2137867" y="835762"/>
+                </a:lnTo>
+                <a:lnTo>
+                  <a:pt x="2168042" y="773582"/>
+                </a:lnTo>
+                <a:lnTo>
+                  <a:pt x="2199132" y="714146"/>
+                </a:lnTo>
+                <a:lnTo>
+                  <a:pt x="2229307" y="656539"/>
+                </a:lnTo>
+                <a:lnTo>
+                  <a:pt x="2260397" y="601675"/>
+                </a:lnTo>
+                <a:lnTo>
+                  <a:pt x="2290572" y="550469"/>
+                </a:lnTo>
+                <a:lnTo>
+                  <a:pt x="2320747" y="502006"/>
+                </a:lnTo>
+                <a:lnTo>
+                  <a:pt x="2351837" y="456286"/>
+                </a:lnTo>
+                <a:lnTo>
+                  <a:pt x="2382012" y="413309"/>
+                </a:lnTo>
+                <a:lnTo>
+                  <a:pt x="2413102" y="373990"/>
+                </a:lnTo>
+                <a:lnTo>
+                  <a:pt x="2443277" y="337414"/>
+                </a:lnTo>
+                <a:lnTo>
+                  <a:pt x="2473452" y="304495"/>
+                </a:lnTo>
+                <a:lnTo>
+                  <a:pt x="2504542" y="273406"/>
+                </a:lnTo>
+                <a:lnTo>
+                  <a:pt x="2534717" y="245974"/>
+                </a:lnTo>
+                <a:lnTo>
+                  <a:pt x="2565806" y="220370"/>
+                </a:lnTo>
+                <a:lnTo>
+                  <a:pt x="2595982" y="197510"/>
+                </a:lnTo>
+                <a:lnTo>
+                  <a:pt x="2626157" y="176479"/>
+                </a:lnTo>
+                <a:lnTo>
+                  <a:pt x="2657246" y="157277"/>
+                </a:lnTo>
+                <a:lnTo>
+                  <a:pt x="2687422" y="139903"/>
+                </a:lnTo>
+                <a:lnTo>
+                  <a:pt x="2718511" y="124358"/>
+                </a:lnTo>
+                <a:lnTo>
+                  <a:pt x="2748686" y="110642"/>
+                </a:lnTo>
+                <a:lnTo>
+                  <a:pt x="2778862" y="98755"/>
+                </a:lnTo>
+                <a:lnTo>
+                  <a:pt x="2809951" y="87782"/>
+                </a:lnTo>
+                <a:lnTo>
+                  <a:pt x="2840126" y="77724"/>
+                </a:lnTo>
+                <a:lnTo>
+                  <a:pt x="2871216" y="68580"/>
+                </a:lnTo>
+                <a:lnTo>
+                  <a:pt x="2901391" y="60350"/>
+                </a:lnTo>
+                <a:lnTo>
+                  <a:pt x="2931566" y="53950"/>
+                </a:lnTo>
+                <a:lnTo>
+                  <a:pt x="2962656" y="47549"/>
+                </a:lnTo>
+                <a:lnTo>
+                  <a:pt x="2992831" y="42062"/>
+                </a:lnTo>
+                <a:lnTo>
+                  <a:pt x="3023921" y="36576"/>
+                </a:lnTo>
+                <a:lnTo>
+                  <a:pt x="3054096" y="32004"/>
+                </a:lnTo>
+                <a:lnTo>
+                  <a:pt x="3084271" y="28346"/>
+                </a:lnTo>
+                <a:lnTo>
+                  <a:pt x="3115361" y="24689"/>
+                </a:lnTo>
+                <a:lnTo>
+                  <a:pt x="3145536" y="21946"/>
+                </a:lnTo>
+                <a:lnTo>
+                  <a:pt x="3176626" y="19202"/>
+                </a:lnTo>
+                <a:lnTo>
+                  <a:pt x="3206801" y="16459"/>
+                </a:lnTo>
+                <a:lnTo>
+                  <a:pt x="3236976" y="14630"/>
+                </a:lnTo>
+                <a:lnTo>
+                  <a:pt x="3268066" y="12802"/>
+                </a:lnTo>
+                <a:lnTo>
+                  <a:pt x="3298241" y="10973"/>
+                </a:lnTo>
+                <a:lnTo>
+                  <a:pt x="3329330" y="9144"/>
+                </a:lnTo>
+                <a:lnTo>
+                  <a:pt x="3359506" y="8230"/>
+                </a:lnTo>
+                <a:lnTo>
+                  <a:pt x="3389681" y="6401"/>
+                </a:lnTo>
+                <a:lnTo>
+                  <a:pt x="3420770" y="5486"/>
+                </a:lnTo>
+                <a:lnTo>
+                  <a:pt x="3450946" y="4572"/>
+                </a:lnTo>
+                <a:lnTo>
+                  <a:pt x="3482035" y="3658"/>
+                </a:lnTo>
+                <a:lnTo>
+                  <a:pt x="3512210" y="2743"/>
+                </a:lnTo>
+                <a:lnTo>
+                  <a:pt x="3542386" y="2743"/>
+                </a:lnTo>
+                <a:lnTo>
+                  <a:pt x="3573475" y="1829"/>
+                </a:lnTo>
+                <a:lnTo>
+                  <a:pt x="3603650" y="914"/>
+                </a:lnTo>
+                <a:lnTo>
+                  <a:pt x="3634740" y="914"/>
+                </a:lnTo>
+                <a:lnTo>
+                  <a:pt x="3664915" y="0"/>
+                </a:lnTo>
+              </a:path>
+            </a:pathLst>
+          </a:custGeom>
+          <a:noFill/>
+          <a:ln w="44450">
+            <a:solidFill>
+              <a:srgbClr val="0072B2"/>
+            </a:solidFill>
+            <a:prstDash val="solid"/>
+          </a:ln>
+        </p:spPr>
+      </p:sp>
+      <p:sp>
+        <p:nvSpPr>
+          <p:cNvPr id="14" name="Shape 12"/>
+          <p:cNvSpPr/>
+          <p:nvPr/>
+        </p:nvSpPr>
+        <p:spPr>
+          <a:xfrm>
+            <a:off x="1636776" y="3018434"/>
+            <a:ext cx="3664915" cy="2195474"/>
+          </a:xfrm>
+          <a:custGeom>
+            <a:avLst/>
+            <a:gdLst/>
+            <a:ahLst/>
+            <a:cxnLst/>
+            <a:rect l="l" t="t" r="r" b="b"/>
+            <a:pathLst>
+              <a:path w="3664915" h="2195474">
+                <a:moveTo>
+                  <a:pt x="0" y="2195474"/>
+                </a:moveTo>
+                <a:lnTo>
+                  <a:pt x="30175" y="2194560"/>
+                </a:lnTo>
+                <a:lnTo>
+                  <a:pt x="61265" y="2194560"/>
+                </a:lnTo>
+                <a:lnTo>
+                  <a:pt x="91440" y="2193646"/>
+                </a:lnTo>
+                <a:lnTo>
+                  <a:pt x="122530" y="2192731"/>
+                </a:lnTo>
+                <a:lnTo>
+                  <a:pt x="152705" y="2192731"/>
+                </a:lnTo>
+                <a:lnTo>
+                  <a:pt x="182880" y="2191817"/>
+                </a:lnTo>
+                <a:lnTo>
+                  <a:pt x="213970" y="2190902"/>
+                </a:lnTo>
+                <a:lnTo>
+                  <a:pt x="244145" y="2189988"/>
+                </a:lnTo>
+                <a:lnTo>
+                  <a:pt x="275234" y="2189074"/>
+                </a:lnTo>
+                <a:lnTo>
+                  <a:pt x="305410" y="2187245"/>
+                </a:lnTo>
+                <a:lnTo>
+                  <a:pt x="335585" y="2186330"/>
+                </a:lnTo>
+                <a:lnTo>
+                  <a:pt x="366674" y="2184502"/>
+                </a:lnTo>
+                <a:lnTo>
+                  <a:pt x="396850" y="2182673"/>
+                </a:lnTo>
+                <a:lnTo>
+                  <a:pt x="427939" y="2180844"/>
+                </a:lnTo>
+                <a:lnTo>
+                  <a:pt x="458114" y="2179015"/>
+                </a:lnTo>
+                <a:lnTo>
+                  <a:pt x="488290" y="2176272"/>
+                </a:lnTo>
+                <a:lnTo>
+                  <a:pt x="519379" y="2173529"/>
+                </a:lnTo>
+                <a:lnTo>
+                  <a:pt x="549554" y="2170786"/>
+                </a:lnTo>
+                <a:lnTo>
+                  <a:pt x="580644" y="2167128"/>
+                </a:lnTo>
+                <a:lnTo>
+                  <a:pt x="610819" y="2163470"/>
+                </a:lnTo>
+                <a:lnTo>
+                  <a:pt x="640994" y="2158898"/>
+                </a:lnTo>
+                <a:lnTo>
+                  <a:pt x="672084" y="2153412"/>
+                </a:lnTo>
+                <a:lnTo>
+                  <a:pt x="702259" y="2147926"/>
+                </a:lnTo>
+                <a:lnTo>
+                  <a:pt x="733349" y="2141525"/>
+                </a:lnTo>
+                <a:lnTo>
+                  <a:pt x="763524" y="2135124"/>
+                </a:lnTo>
+                <a:lnTo>
+                  <a:pt x="793699" y="2126894"/>
+                </a:lnTo>
+                <a:lnTo>
+                  <a:pt x="824789" y="2117750"/>
+                </a:lnTo>
+                <a:lnTo>
+                  <a:pt x="854964" y="2107692"/>
+                </a:lnTo>
+                <a:lnTo>
+                  <a:pt x="886054" y="2096719"/>
+                </a:lnTo>
+                <a:lnTo>
+                  <a:pt x="916229" y="2084832"/>
+                </a:lnTo>
+                <a:lnTo>
+                  <a:pt x="946404" y="2071116"/>
+                </a:lnTo>
+                <a:lnTo>
+                  <a:pt x="977494" y="2055571"/>
+                </a:lnTo>
+                <a:lnTo>
+                  <a:pt x="1007669" y="2038198"/>
+                </a:lnTo>
+                <a:lnTo>
+                  <a:pt x="1038758" y="2018995"/>
+                </a:lnTo>
+                <a:lnTo>
+                  <a:pt x="1068934" y="1997964"/>
+                </a:lnTo>
+                <a:lnTo>
+                  <a:pt x="1099109" y="1975104"/>
+                </a:lnTo>
+                <a:lnTo>
+                  <a:pt x="1130198" y="1949501"/>
+                </a:lnTo>
+                <a:lnTo>
+                  <a:pt x="1160374" y="1922069"/>
+                </a:lnTo>
+                <a:lnTo>
+                  <a:pt x="1191463" y="1890979"/>
+                </a:lnTo>
+                <a:lnTo>
+                  <a:pt x="1221638" y="1858061"/>
+                </a:lnTo>
+                <a:lnTo>
+                  <a:pt x="1251814" y="1821485"/>
+                </a:lnTo>
+                <a:lnTo>
+                  <a:pt x="1282903" y="1782166"/>
+                </a:lnTo>
+                <a:lnTo>
+                  <a:pt x="1313078" y="1739189"/>
+                </a:lnTo>
+                <a:lnTo>
+                  <a:pt x="1344168" y="1693469"/>
+                </a:lnTo>
+                <a:lnTo>
+                  <a:pt x="1374343" y="1645006"/>
+                </a:lnTo>
+                <a:lnTo>
+                  <a:pt x="1404518" y="1593799"/>
+                </a:lnTo>
+                <a:lnTo>
+                  <a:pt x="1435608" y="1538935"/>
+                </a:lnTo>
+                <a:lnTo>
+                  <a:pt x="1465783" y="1481328"/>
+                </a:lnTo>
+                <a:lnTo>
+                  <a:pt x="1496873" y="1421892"/>
+                </a:lnTo>
+                <a:lnTo>
+                  <a:pt x="1527048" y="1359713"/>
+                </a:lnTo>
+                <a:lnTo>
+                  <a:pt x="1557223" y="1296619"/>
+                </a:lnTo>
+                <a:lnTo>
+                  <a:pt x="1588313" y="1231697"/>
+                </a:lnTo>
+                <a:lnTo>
+                  <a:pt x="1618488" y="1164946"/>
+                </a:lnTo>
+                <a:lnTo>
+                  <a:pt x="1649578" y="1098194"/>
+                </a:lnTo>
+                <a:lnTo>
+                  <a:pt x="1679753" y="1032358"/>
+                </a:lnTo>
+                <a:lnTo>
+                  <a:pt x="1709928" y="965606"/>
+                </a:lnTo>
+                <a:lnTo>
+                  <a:pt x="1741018" y="900684"/>
+                </a:lnTo>
+                <a:lnTo>
+                  <a:pt x="1771193" y="837590"/>
+                </a:lnTo>
+                <a:lnTo>
+                  <a:pt x="1802282" y="775411"/>
+                </a:lnTo>
+                <a:lnTo>
+                  <a:pt x="1832458" y="715975"/>
+                </a:lnTo>
+                <a:lnTo>
+                  <a:pt x="1862633" y="658368"/>
+                </a:lnTo>
+                <a:lnTo>
+                  <a:pt x="1893722" y="603504"/>
+                </a:lnTo>
+                <a:lnTo>
+                  <a:pt x="1923898" y="552298"/>
+                </a:lnTo>
+                <a:lnTo>
+                  <a:pt x="1954987" y="503834"/>
+                </a:lnTo>
+                <a:lnTo>
+                  <a:pt x="1985162" y="458114"/>
+                </a:lnTo>
+                <a:lnTo>
+                  <a:pt x="2015338" y="415138"/>
+                </a:lnTo>
+                <a:lnTo>
+                  <a:pt x="2046427" y="375818"/>
+                </a:lnTo>
+                <a:lnTo>
+                  <a:pt x="2076602" y="339242"/>
+                </a:lnTo>
+                <a:lnTo>
+                  <a:pt x="2107692" y="306324"/>
+                </a:lnTo>
+                <a:lnTo>
+                  <a:pt x="2137867" y="275234"/>
+                </a:lnTo>
+                <a:lnTo>
+                  <a:pt x="2168042" y="247802"/>
+                </a:lnTo>
+                <a:lnTo>
+                  <a:pt x="2199132" y="222199"/>
+                </a:lnTo>
+                <a:lnTo>
+                  <a:pt x="2229307" y="199339"/>
+                </a:lnTo>
+                <a:lnTo>
+                  <a:pt x="2260397" y="178308"/>
+                </a:lnTo>
+                <a:lnTo>
+                  <a:pt x="2290572" y="159106"/>
+                </a:lnTo>
+                <a:lnTo>
+                  <a:pt x="2320747" y="141732"/>
+                </a:lnTo>
+                <a:lnTo>
+                  <a:pt x="2351837" y="126187"/>
+                </a:lnTo>
+                <a:lnTo>
+                  <a:pt x="2382012" y="112471"/>
+                </a:lnTo>
+                <a:lnTo>
+                  <a:pt x="2413102" y="100584"/>
+                </a:lnTo>
+                <a:lnTo>
+                  <a:pt x="2443277" y="89611"/>
+                </a:lnTo>
+                <a:lnTo>
+                  <a:pt x="2473452" y="79553"/>
+                </a:lnTo>
+                <a:lnTo>
+                  <a:pt x="2504542" y="70409"/>
+                </a:lnTo>
+                <a:lnTo>
+                  <a:pt x="2534717" y="62179"/>
+                </a:lnTo>
+                <a:lnTo>
+                  <a:pt x="2565806" y="55778"/>
+                </a:lnTo>
+                <a:lnTo>
+                  <a:pt x="2595982" y="49378"/>
+                </a:lnTo>
+                <a:lnTo>
+                  <a:pt x="2626157" y="43891"/>
+                </a:lnTo>
+                <a:lnTo>
+                  <a:pt x="2657246" y="38405"/>
+                </a:lnTo>
+                <a:lnTo>
+                  <a:pt x="2687422" y="33833"/>
+                </a:lnTo>
+                <a:lnTo>
+                  <a:pt x="2718511" y="30175"/>
+                </a:lnTo>
+                <a:lnTo>
+                  <a:pt x="2748686" y="26518"/>
+                </a:lnTo>
+                <a:lnTo>
+                  <a:pt x="2778862" y="23774"/>
+                </a:lnTo>
+                <a:lnTo>
+                  <a:pt x="2809951" y="21031"/>
+                </a:lnTo>
+                <a:lnTo>
+                  <a:pt x="2840126" y="18288"/>
+                </a:lnTo>
+                <a:lnTo>
+                  <a:pt x="2871216" y="16459"/>
+                </a:lnTo>
+                <a:lnTo>
+                  <a:pt x="2901391" y="14630"/>
+                </a:lnTo>
+                <a:lnTo>
+                  <a:pt x="2931566" y="12802"/>
+                </a:lnTo>
+                <a:lnTo>
+                  <a:pt x="2962656" y="10973"/>
+                </a:lnTo>
+                <a:lnTo>
+                  <a:pt x="2992831" y="10058"/>
+                </a:lnTo>
+                <a:lnTo>
+                  <a:pt x="3023921" y="8230"/>
+                </a:lnTo>
+                <a:lnTo>
+                  <a:pt x="3054096" y="7315"/>
+                </a:lnTo>
+                <a:lnTo>
+                  <a:pt x="3084271" y="6401"/>
+                </a:lnTo>
+                <a:lnTo>
+                  <a:pt x="3115361" y="5486"/>
+                </a:lnTo>
+                <a:lnTo>
+                  <a:pt x="3145536" y="4572"/>
+                </a:lnTo>
+                <a:lnTo>
+                  <a:pt x="3176626" y="4572"/>
+                </a:lnTo>
+                <a:lnTo>
+                  <a:pt x="3206801" y="3658"/>
+                </a:lnTo>
+                <a:lnTo>
+                  <a:pt x="3236976" y="2743"/>
+                </a:lnTo>
+                <a:lnTo>
+                  <a:pt x="3268066" y="2743"/>
+                </a:lnTo>
+                <a:lnTo>
+                  <a:pt x="3298241" y="1829"/>
+                </a:lnTo>
+                <a:lnTo>
+                  <a:pt x="3329330" y="1829"/>
+                </a:lnTo>
+                <a:lnTo>
+                  <a:pt x="3359506" y="1829"/>
+                </a:lnTo>
+                <a:lnTo>
+                  <a:pt x="3389681" y="914"/>
+                </a:lnTo>
+                <a:lnTo>
+                  <a:pt x="3420770" y="914"/>
+                </a:lnTo>
+                <a:lnTo>
+                  <a:pt x="3450946" y="914"/>
+                </a:lnTo>
+                <a:lnTo>
+                  <a:pt x="3482035" y="914"/>
+                </a:lnTo>
+                <a:lnTo>
+                  <a:pt x="3512210" y="0"/>
+                </a:lnTo>
+                <a:lnTo>
+                  <a:pt x="3542386" y="0"/>
+                </a:lnTo>
+                <a:lnTo>
+                  <a:pt x="3573475" y="0"/>
+                </a:lnTo>
+                <a:lnTo>
+                  <a:pt x="3603650" y="0"/>
+                </a:lnTo>
+                <a:lnTo>
+                  <a:pt x="3634740" y="0"/>
+                </a:lnTo>
+                <a:lnTo>
+                  <a:pt x="3664915" y="0"/>
+                </a:lnTo>
+              </a:path>
+            </a:pathLst>
+          </a:custGeom>
+          <a:noFill/>
+          <a:ln w="44450">
+            <a:solidFill>
+              <a:srgbClr val="D55E00"/>
+            </a:solidFill>
+            <a:prstDash val="solid"/>
+          </a:ln>
+        </p:spPr>
+      </p:sp>
+      <p:sp>
+        <p:nvSpPr>
+          <p:cNvPr id="15" name="Shape 13"/>
+          <p:cNvSpPr/>
+          <p:nvPr/>
+        </p:nvSpPr>
+        <p:spPr>
+          <a:xfrm>
+            <a:off x="1600200" y="2845613"/>
             <a:ext cx="9144" cy="2412187"/>
           </a:xfrm>
           <a:custGeom>
@@ -10112,13 +11017,13 @@
       </p:sp>
       <p:sp>
         <p:nvSpPr>
-          <p:cNvPr id="14" name="Shape 12"/>
+          <p:cNvPr id="16" name="Shape 14"/>
           <p:cNvSpPr/>
           <p:nvPr/>
         </p:nvSpPr>
         <p:spPr>
           <a:xfrm>
-            <a:off x="1389888" y="2743200"/>
+            <a:off x="1527048" y="2743200"/>
             <a:ext cx="146304" cy="146304"/>
           </a:xfrm>
           <a:custGeom>
@@ -10155,14 +11060,14 @@
       </p:sp>
       <p:sp>
         <p:nvSpPr>
-          <p:cNvPr id="15" name="Shape 13"/>
+          <p:cNvPr id="17" name="Shape 15"/>
           <p:cNvSpPr/>
           <p:nvPr/>
         </p:nvSpPr>
         <p:spPr>
           <a:xfrm>
-            <a:off x="1463040" y="5257800"/>
-            <a:ext cx="4835347" cy="9144"/>
+            <a:off x="1600200" y="5257800"/>
+            <a:ext cx="4698187" cy="9144"/>
           </a:xfrm>
           <a:custGeom>
             <a:avLst/>
@@ -10171,12 +11076,12 @@
             <a:cxnLst/>
             <a:rect l="l" t="t" r="r" b="b"/>
             <a:pathLst>
-              <a:path w="4835347" h="9144">
+              <a:path w="4698187" h="9144">
                 <a:moveTo>
                   <a:pt x="0" y="0"/>
                 </a:moveTo>
                 <a:lnTo>
-                  <a:pt x="4835347" y="0"/>
+                  <a:pt x="4698187" y="0"/>
                 </a:lnTo>
               </a:path>
             </a:pathLst>
@@ -10192,7 +11097,7 @@
       </p:sp>
       <p:sp>
         <p:nvSpPr>
-          <p:cNvPr id="16" name="Shape 14"/>
+          <p:cNvPr id="18" name="Shape 16"/>
           <p:cNvSpPr/>
           <p:nvPr/>
         </p:nvSpPr>
@@ -10235,14 +11140,14 @@
       </p:sp>
       <p:sp>
         <p:nvSpPr>
-          <p:cNvPr id="17" name="Shape 15"/>
+          <p:cNvPr id="19" name="Shape 17"/>
           <p:cNvSpPr/>
           <p:nvPr/>
         </p:nvSpPr>
         <p:spPr>
           <a:xfrm>
-            <a:off x="1499616" y="3021178"/>
-            <a:ext cx="4718304" cy="2236622"/>
+            <a:off x="3274354" y="4666869"/>
+            <a:ext cx="880384" cy="9144"/>
           </a:xfrm>
           <a:custGeom>
             <a:avLst/>
@@ -10251,797 +11156,9 @@
             <a:cxnLst/>
             <a:rect l="l" t="t" r="r" b="b"/>
             <a:pathLst>
-              <a:path w="4718304" h="2236622">
+              <a:path w="880384" h="9144">
                 <a:moveTo>
-                  <a:pt x="0" y="2236622"/>
-                </a:moveTo>
-                <a:lnTo>
-                  <a:pt x="39319" y="2236622"/>
-                </a:lnTo>
-                <a:lnTo>
-                  <a:pt x="78638" y="2236622"/>
-                </a:lnTo>
-                <a:lnTo>
-                  <a:pt x="117958" y="2236622"/>
-                </a:lnTo>
-                <a:lnTo>
-                  <a:pt x="157277" y="2236622"/>
-                </a:lnTo>
-                <a:lnTo>
-                  <a:pt x="196596" y="2236622"/>
-                </a:lnTo>
-                <a:lnTo>
-                  <a:pt x="235915" y="2236622"/>
-                </a:lnTo>
-                <a:lnTo>
-                  <a:pt x="275234" y="2236622"/>
-                </a:lnTo>
-                <a:lnTo>
-                  <a:pt x="314554" y="2236622"/>
-                </a:lnTo>
-                <a:lnTo>
-                  <a:pt x="353873" y="2236622"/>
-                </a:lnTo>
-                <a:lnTo>
-                  <a:pt x="393192" y="2236622"/>
-                </a:lnTo>
-                <a:lnTo>
-                  <a:pt x="432511" y="2236622"/>
-                </a:lnTo>
-                <a:lnTo>
-                  <a:pt x="471830" y="2236622"/>
-                </a:lnTo>
-                <a:lnTo>
-                  <a:pt x="511150" y="2236622"/>
-                </a:lnTo>
-                <a:lnTo>
-                  <a:pt x="550469" y="2236622"/>
-                </a:lnTo>
-                <a:lnTo>
-                  <a:pt x="589788" y="2236622"/>
-                </a:lnTo>
-                <a:lnTo>
-                  <a:pt x="629107" y="2236622"/>
-                </a:lnTo>
-                <a:lnTo>
-                  <a:pt x="668426" y="2236622"/>
-                </a:lnTo>
-                <a:lnTo>
-                  <a:pt x="707746" y="2236622"/>
-                </a:lnTo>
-                <a:lnTo>
-                  <a:pt x="747065" y="2236622"/>
-                </a:lnTo>
-                <a:lnTo>
-                  <a:pt x="786384" y="2236622"/>
-                </a:lnTo>
-                <a:lnTo>
-                  <a:pt x="825703" y="2235708"/>
-                </a:lnTo>
-                <a:lnTo>
-                  <a:pt x="865022" y="2235708"/>
-                </a:lnTo>
-                <a:lnTo>
-                  <a:pt x="904342" y="2235708"/>
-                </a:lnTo>
-                <a:lnTo>
-                  <a:pt x="943661" y="2235708"/>
-                </a:lnTo>
-                <a:lnTo>
-                  <a:pt x="982980" y="2235708"/>
-                </a:lnTo>
-                <a:lnTo>
-                  <a:pt x="1022299" y="2235708"/>
-                </a:lnTo>
-                <a:lnTo>
-                  <a:pt x="1061618" y="2235708"/>
-                </a:lnTo>
-                <a:lnTo>
-                  <a:pt x="1100938" y="2234794"/>
-                </a:lnTo>
-                <a:lnTo>
-                  <a:pt x="1140257" y="2234794"/>
-                </a:lnTo>
-                <a:lnTo>
-                  <a:pt x="1179576" y="2234794"/>
-                </a:lnTo>
-                <a:lnTo>
-                  <a:pt x="1218895" y="2234794"/>
-                </a:lnTo>
-                <a:lnTo>
-                  <a:pt x="1258214" y="2233879"/>
-                </a:lnTo>
-                <a:lnTo>
-                  <a:pt x="1297534" y="2233879"/>
-                </a:lnTo>
-                <a:lnTo>
-                  <a:pt x="1336853" y="2232965"/>
-                </a:lnTo>
-                <a:lnTo>
-                  <a:pt x="1376172" y="2232965"/>
-                </a:lnTo>
-                <a:lnTo>
-                  <a:pt x="1415491" y="2232050"/>
-                </a:lnTo>
-                <a:lnTo>
-                  <a:pt x="1454810" y="2231136"/>
-                </a:lnTo>
-                <a:lnTo>
-                  <a:pt x="1494130" y="2230222"/>
-                </a:lnTo>
-                <a:lnTo>
-                  <a:pt x="1533449" y="2229307"/>
-                </a:lnTo>
-                <a:lnTo>
-                  <a:pt x="1572768" y="2228393"/>
-                </a:lnTo>
-                <a:lnTo>
-                  <a:pt x="1612087" y="2226564"/>
-                </a:lnTo>
-                <a:lnTo>
-                  <a:pt x="1651406" y="2224735"/>
-                </a:lnTo>
-                <a:lnTo>
-                  <a:pt x="1690726" y="2222906"/>
-                </a:lnTo>
-                <a:lnTo>
-                  <a:pt x="1730045" y="2221078"/>
-                </a:lnTo>
-                <a:lnTo>
-                  <a:pt x="1769364" y="2218334"/>
-                </a:lnTo>
-                <a:lnTo>
-                  <a:pt x="1808683" y="2215591"/>
-                </a:lnTo>
-                <a:lnTo>
-                  <a:pt x="1848002" y="2211934"/>
-                </a:lnTo>
-                <a:lnTo>
-                  <a:pt x="1887322" y="2208276"/>
-                </a:lnTo>
-                <a:lnTo>
-                  <a:pt x="1926641" y="2203704"/>
-                </a:lnTo>
-                <a:lnTo>
-                  <a:pt x="1965960" y="2198218"/>
-                </a:lnTo>
-                <a:lnTo>
-                  <a:pt x="2005279" y="2192731"/>
-                </a:lnTo>
-                <a:lnTo>
-                  <a:pt x="2044598" y="2185416"/>
-                </a:lnTo>
-                <a:lnTo>
-                  <a:pt x="2083918" y="2177186"/>
-                </a:lnTo>
-                <a:lnTo>
-                  <a:pt x="2123237" y="2168042"/>
-                </a:lnTo>
-                <a:lnTo>
-                  <a:pt x="2162556" y="2157070"/>
-                </a:lnTo>
-                <a:lnTo>
-                  <a:pt x="2201875" y="2144268"/>
-                </a:lnTo>
-                <a:lnTo>
-                  <a:pt x="2241194" y="2130552"/>
-                </a:lnTo>
-                <a:lnTo>
-                  <a:pt x="2280514" y="2114093"/>
-                </a:lnTo>
-                <a:lnTo>
-                  <a:pt x="2319833" y="2094890"/>
-                </a:lnTo>
-                <a:lnTo>
-                  <a:pt x="2359152" y="2073859"/>
-                </a:lnTo>
-                <a:lnTo>
-                  <a:pt x="2398471" y="2049170"/>
-                </a:lnTo>
-                <a:lnTo>
-                  <a:pt x="2437790" y="2021738"/>
-                </a:lnTo>
-                <a:lnTo>
-                  <a:pt x="2477110" y="1990649"/>
-                </a:lnTo>
-                <a:lnTo>
-                  <a:pt x="2516429" y="1954987"/>
-                </a:lnTo>
-                <a:lnTo>
-                  <a:pt x="2555748" y="1915668"/>
-                </a:lnTo>
-                <a:lnTo>
-                  <a:pt x="2595067" y="1871777"/>
-                </a:lnTo>
-                <a:lnTo>
-                  <a:pt x="2634386" y="1822399"/>
-                </a:lnTo>
-                <a:lnTo>
-                  <a:pt x="2673706" y="1769364"/>
-                </a:lnTo>
-                <a:lnTo>
-                  <a:pt x="2713025" y="1710842"/>
-                </a:lnTo>
-                <a:lnTo>
-                  <a:pt x="2752344" y="1647749"/>
-                </a:lnTo>
-                <a:lnTo>
-                  <a:pt x="2791663" y="1579169"/>
-                </a:lnTo>
-                <a:lnTo>
-                  <a:pt x="2830982" y="1506931"/>
-                </a:lnTo>
-                <a:lnTo>
-                  <a:pt x="2870302" y="1430122"/>
-                </a:lnTo>
-                <a:lnTo>
-                  <a:pt x="2909621" y="1350569"/>
-                </a:lnTo>
-                <a:lnTo>
-                  <a:pt x="2948940" y="1268273"/>
-                </a:lnTo>
-                <a:lnTo>
-                  <a:pt x="2988259" y="1184148"/>
-                </a:lnTo>
-                <a:lnTo>
-                  <a:pt x="3027578" y="1099109"/>
-                </a:lnTo>
-                <a:lnTo>
-                  <a:pt x="3066898" y="1014984"/>
-                </a:lnTo>
-                <a:lnTo>
-                  <a:pt x="3106217" y="931774"/>
-                </a:lnTo>
-                <a:lnTo>
-                  <a:pt x="3145536" y="850392"/>
-                </a:lnTo>
-                <a:lnTo>
-                  <a:pt x="3184855" y="771754"/>
-                </a:lnTo>
-                <a:lnTo>
-                  <a:pt x="3224174" y="696773"/>
-                </a:lnTo>
-                <a:lnTo>
-                  <a:pt x="3263494" y="626364"/>
-                </a:lnTo>
-                <a:lnTo>
-                  <a:pt x="3302813" y="559613"/>
-                </a:lnTo>
-                <a:lnTo>
-                  <a:pt x="3342132" y="498348"/>
-                </a:lnTo>
-                <a:lnTo>
-                  <a:pt x="3381451" y="441655"/>
-                </a:lnTo>
-                <a:lnTo>
-                  <a:pt x="3420770" y="390449"/>
-                </a:lnTo>
-                <a:lnTo>
-                  <a:pt x="3460090" y="342900"/>
-                </a:lnTo>
-                <a:lnTo>
-                  <a:pt x="3499409" y="300838"/>
-                </a:lnTo>
-                <a:lnTo>
-                  <a:pt x="3538728" y="263347"/>
-                </a:lnTo>
-                <a:lnTo>
-                  <a:pt x="3578047" y="229514"/>
-                </a:lnTo>
-                <a:lnTo>
-                  <a:pt x="3617366" y="200254"/>
-                </a:lnTo>
-                <a:lnTo>
-                  <a:pt x="3656686" y="173736"/>
-                </a:lnTo>
-                <a:lnTo>
-                  <a:pt x="3696005" y="149962"/>
-                </a:lnTo>
-                <a:lnTo>
-                  <a:pt x="3735324" y="129845"/>
-                </a:lnTo>
-                <a:lnTo>
-                  <a:pt x="3774643" y="112471"/>
-                </a:lnTo>
-                <a:lnTo>
-                  <a:pt x="3813962" y="96926"/>
-                </a:lnTo>
-                <a:lnTo>
-                  <a:pt x="3853282" y="83210"/>
-                </a:lnTo>
-                <a:lnTo>
-                  <a:pt x="3892601" y="71323"/>
-                </a:lnTo>
-                <a:lnTo>
-                  <a:pt x="3931920" y="61265"/>
-                </a:lnTo>
-                <a:lnTo>
-                  <a:pt x="3971239" y="52121"/>
-                </a:lnTo>
-                <a:lnTo>
-                  <a:pt x="4010558" y="44806"/>
-                </a:lnTo>
-                <a:lnTo>
-                  <a:pt x="4049878" y="37490"/>
-                </a:lnTo>
-                <a:lnTo>
-                  <a:pt x="4089197" y="32004"/>
-                </a:lnTo>
-                <a:lnTo>
-                  <a:pt x="4128516" y="27432"/>
-                </a:lnTo>
-                <a:lnTo>
-                  <a:pt x="4167835" y="22860"/>
-                </a:lnTo>
-                <a:lnTo>
-                  <a:pt x="4207154" y="19202"/>
-                </a:lnTo>
-                <a:lnTo>
-                  <a:pt x="4246474" y="15545"/>
-                </a:lnTo>
-                <a:lnTo>
-                  <a:pt x="4285793" y="12802"/>
-                </a:lnTo>
-                <a:lnTo>
-                  <a:pt x="4325112" y="10973"/>
-                </a:lnTo>
-                <a:lnTo>
-                  <a:pt x="4364431" y="9144"/>
-                </a:lnTo>
-                <a:lnTo>
-                  <a:pt x="4403750" y="7315"/>
-                </a:lnTo>
-                <a:lnTo>
-                  <a:pt x="4443070" y="5486"/>
-                </a:lnTo>
-                <a:lnTo>
-                  <a:pt x="4482389" y="4572"/>
-                </a:lnTo>
-                <a:lnTo>
-                  <a:pt x="4521708" y="2743"/>
-                </a:lnTo>
-                <a:lnTo>
-                  <a:pt x="4561027" y="1829"/>
-                </a:lnTo>
-                <a:lnTo>
-                  <a:pt x="4600346" y="1829"/>
-                </a:lnTo>
-                <a:lnTo>
-                  <a:pt x="4639666" y="914"/>
-                </a:lnTo>
-                <a:lnTo>
-                  <a:pt x="4678985" y="0"/>
-                </a:lnTo>
-                <a:lnTo>
-                  <a:pt x="4718304" y="0"/>
-                </a:lnTo>
-              </a:path>
-            </a:pathLst>
-          </a:custGeom>
-          <a:noFill/>
-          <a:ln w="44450">
-            <a:solidFill>
-              <a:srgbClr val="0072B2"/>
-            </a:solidFill>
-            <a:prstDash val="solid"/>
-          </a:ln>
-        </p:spPr>
-      </p:sp>
-      <p:sp>
-        <p:nvSpPr>
-          <p:cNvPr id="18" name="Shape 16"/>
-          <p:cNvSpPr/>
-          <p:nvPr/>
-        </p:nvSpPr>
-        <p:spPr>
-          <a:xfrm>
-            <a:off x="1499616" y="3017520"/>
-            <a:ext cx="4718304" cy="2236622"/>
-          </a:xfrm>
-          <a:custGeom>
-            <a:avLst/>
-            <a:gdLst/>
-            <a:ahLst/>
-            <a:cxnLst/>
-            <a:rect l="l" t="t" r="r" b="b"/>
-            <a:pathLst>
-              <a:path w="4718304" h="2236622">
-                <a:moveTo>
-                  <a:pt x="0" y="2236622"/>
-                </a:moveTo>
-                <a:lnTo>
-                  <a:pt x="39319" y="2236622"/>
-                </a:lnTo>
-                <a:lnTo>
-                  <a:pt x="78638" y="2235708"/>
-                </a:lnTo>
-                <a:lnTo>
-                  <a:pt x="117958" y="2234794"/>
-                </a:lnTo>
-                <a:lnTo>
-                  <a:pt x="157277" y="2234794"/>
-                </a:lnTo>
-                <a:lnTo>
-                  <a:pt x="196596" y="2233879"/>
-                </a:lnTo>
-                <a:lnTo>
-                  <a:pt x="235915" y="2232050"/>
-                </a:lnTo>
-                <a:lnTo>
-                  <a:pt x="275234" y="2231136"/>
-                </a:lnTo>
-                <a:lnTo>
-                  <a:pt x="314554" y="2229307"/>
-                </a:lnTo>
-                <a:lnTo>
-                  <a:pt x="353873" y="2227478"/>
-                </a:lnTo>
-                <a:lnTo>
-                  <a:pt x="393192" y="2225650"/>
-                </a:lnTo>
-                <a:lnTo>
-                  <a:pt x="432511" y="2223821"/>
-                </a:lnTo>
-                <a:lnTo>
-                  <a:pt x="471830" y="2221078"/>
-                </a:lnTo>
-                <a:lnTo>
-                  <a:pt x="511150" y="2217420"/>
-                </a:lnTo>
-                <a:lnTo>
-                  <a:pt x="550469" y="2213762"/>
-                </a:lnTo>
-                <a:lnTo>
-                  <a:pt x="589788" y="2209190"/>
-                </a:lnTo>
-                <a:lnTo>
-                  <a:pt x="629107" y="2204618"/>
-                </a:lnTo>
-                <a:lnTo>
-                  <a:pt x="668426" y="2199132"/>
-                </a:lnTo>
-                <a:lnTo>
-                  <a:pt x="707746" y="2191817"/>
-                </a:lnTo>
-                <a:lnTo>
-                  <a:pt x="747065" y="2184502"/>
-                </a:lnTo>
-                <a:lnTo>
-                  <a:pt x="786384" y="2175358"/>
-                </a:lnTo>
-                <a:lnTo>
-                  <a:pt x="825703" y="2165299"/>
-                </a:lnTo>
-                <a:lnTo>
-                  <a:pt x="865022" y="2153412"/>
-                </a:lnTo>
-                <a:lnTo>
-                  <a:pt x="904342" y="2139696"/>
-                </a:lnTo>
-                <a:lnTo>
-                  <a:pt x="943661" y="2124151"/>
-                </a:lnTo>
-                <a:lnTo>
-                  <a:pt x="982980" y="2106778"/>
-                </a:lnTo>
-                <a:lnTo>
-                  <a:pt x="1022299" y="2086661"/>
-                </a:lnTo>
-                <a:lnTo>
-                  <a:pt x="1061618" y="2062886"/>
-                </a:lnTo>
-                <a:lnTo>
-                  <a:pt x="1100938" y="2036369"/>
-                </a:lnTo>
-                <a:lnTo>
-                  <a:pt x="1140257" y="2007108"/>
-                </a:lnTo>
-                <a:lnTo>
-                  <a:pt x="1179576" y="1973275"/>
-                </a:lnTo>
-                <a:lnTo>
-                  <a:pt x="1218895" y="1935785"/>
-                </a:lnTo>
-                <a:lnTo>
-                  <a:pt x="1258214" y="1893722"/>
-                </a:lnTo>
-                <a:lnTo>
-                  <a:pt x="1297534" y="1846174"/>
-                </a:lnTo>
-                <a:lnTo>
-                  <a:pt x="1336853" y="1794967"/>
-                </a:lnTo>
-                <a:lnTo>
-                  <a:pt x="1376172" y="1738274"/>
-                </a:lnTo>
-                <a:lnTo>
-                  <a:pt x="1415491" y="1677010"/>
-                </a:lnTo>
-                <a:lnTo>
-                  <a:pt x="1454810" y="1610258"/>
-                </a:lnTo>
-                <a:lnTo>
-                  <a:pt x="1494130" y="1539850"/>
-                </a:lnTo>
-                <a:lnTo>
-                  <a:pt x="1533449" y="1464869"/>
-                </a:lnTo>
-                <a:lnTo>
-                  <a:pt x="1572768" y="1386230"/>
-                </a:lnTo>
-                <a:lnTo>
-                  <a:pt x="1612087" y="1304849"/>
-                </a:lnTo>
-                <a:lnTo>
-                  <a:pt x="1651406" y="1221638"/>
-                </a:lnTo>
-                <a:lnTo>
-                  <a:pt x="1690726" y="1137514"/>
-                </a:lnTo>
-                <a:lnTo>
-                  <a:pt x="1730045" y="1052474"/>
-                </a:lnTo>
-                <a:lnTo>
-                  <a:pt x="1769364" y="968350"/>
-                </a:lnTo>
-                <a:lnTo>
-                  <a:pt x="1808683" y="886054"/>
-                </a:lnTo>
-                <a:lnTo>
-                  <a:pt x="1848002" y="806501"/>
-                </a:lnTo>
-                <a:lnTo>
-                  <a:pt x="1887322" y="729691"/>
-                </a:lnTo>
-                <a:lnTo>
-                  <a:pt x="1926641" y="657454"/>
-                </a:lnTo>
-                <a:lnTo>
-                  <a:pt x="1965960" y="588874"/>
-                </a:lnTo>
-                <a:lnTo>
-                  <a:pt x="2005279" y="525780"/>
-                </a:lnTo>
-                <a:lnTo>
-                  <a:pt x="2044598" y="467258"/>
-                </a:lnTo>
-                <a:lnTo>
-                  <a:pt x="2083918" y="414223"/>
-                </a:lnTo>
-                <a:lnTo>
-                  <a:pt x="2123237" y="364846"/>
-                </a:lnTo>
-                <a:lnTo>
-                  <a:pt x="2162556" y="320954"/>
-                </a:lnTo>
-                <a:lnTo>
-                  <a:pt x="2201875" y="281635"/>
-                </a:lnTo>
-                <a:lnTo>
-                  <a:pt x="2241194" y="245974"/>
-                </a:lnTo>
-                <a:lnTo>
-                  <a:pt x="2280514" y="214884"/>
-                </a:lnTo>
-                <a:lnTo>
-                  <a:pt x="2319833" y="187452"/>
-                </a:lnTo>
-                <a:lnTo>
-                  <a:pt x="2359152" y="162763"/>
-                </a:lnTo>
-                <a:lnTo>
-                  <a:pt x="2398471" y="141732"/>
-                </a:lnTo>
-                <a:lnTo>
-                  <a:pt x="2437790" y="122530"/>
-                </a:lnTo>
-                <a:lnTo>
-                  <a:pt x="2477110" y="106070"/>
-                </a:lnTo>
-                <a:lnTo>
-                  <a:pt x="2516429" y="92354"/>
-                </a:lnTo>
-                <a:lnTo>
-                  <a:pt x="2555748" y="79553"/>
-                </a:lnTo>
-                <a:lnTo>
-                  <a:pt x="2595067" y="68580"/>
-                </a:lnTo>
-                <a:lnTo>
-                  <a:pt x="2634386" y="59436"/>
-                </a:lnTo>
-                <a:lnTo>
-                  <a:pt x="2673706" y="51206"/>
-                </a:lnTo>
-                <a:lnTo>
-                  <a:pt x="2713025" y="43891"/>
-                </a:lnTo>
-                <a:lnTo>
-                  <a:pt x="2752344" y="38405"/>
-                </a:lnTo>
-                <a:lnTo>
-                  <a:pt x="2791663" y="32918"/>
-                </a:lnTo>
-                <a:lnTo>
-                  <a:pt x="2830982" y="28346"/>
-                </a:lnTo>
-                <a:lnTo>
-                  <a:pt x="2870302" y="24689"/>
-                </a:lnTo>
-                <a:lnTo>
-                  <a:pt x="2909621" y="21031"/>
-                </a:lnTo>
-                <a:lnTo>
-                  <a:pt x="2948940" y="18288"/>
-                </a:lnTo>
-                <a:lnTo>
-                  <a:pt x="2988259" y="15545"/>
-                </a:lnTo>
-                <a:lnTo>
-                  <a:pt x="3027578" y="13716"/>
-                </a:lnTo>
-                <a:lnTo>
-                  <a:pt x="3066898" y="11887"/>
-                </a:lnTo>
-                <a:lnTo>
-                  <a:pt x="3106217" y="10058"/>
-                </a:lnTo>
-                <a:lnTo>
-                  <a:pt x="3145536" y="8230"/>
-                </a:lnTo>
-                <a:lnTo>
-                  <a:pt x="3184855" y="7315"/>
-                </a:lnTo>
-                <a:lnTo>
-                  <a:pt x="3224174" y="6401"/>
-                </a:lnTo>
-                <a:lnTo>
-                  <a:pt x="3263494" y="5486"/>
-                </a:lnTo>
-                <a:lnTo>
-                  <a:pt x="3302813" y="4572"/>
-                </a:lnTo>
-                <a:lnTo>
-                  <a:pt x="3342132" y="3658"/>
-                </a:lnTo>
-                <a:lnTo>
-                  <a:pt x="3381451" y="3658"/>
-                </a:lnTo>
-                <a:lnTo>
-                  <a:pt x="3420770" y="2743"/>
-                </a:lnTo>
-                <a:lnTo>
-                  <a:pt x="3460090" y="2743"/>
-                </a:lnTo>
-                <a:lnTo>
-                  <a:pt x="3499409" y="1829"/>
-                </a:lnTo>
-                <a:lnTo>
-                  <a:pt x="3538728" y="1829"/>
-                </a:lnTo>
-                <a:lnTo>
-                  <a:pt x="3578047" y="1829"/>
-                </a:lnTo>
-                <a:lnTo>
-                  <a:pt x="3617366" y="1829"/>
-                </a:lnTo>
-                <a:lnTo>
-                  <a:pt x="3656686" y="914"/>
-                </a:lnTo>
-                <a:lnTo>
-                  <a:pt x="3696005" y="914"/>
-                </a:lnTo>
-                <a:lnTo>
-                  <a:pt x="3735324" y="914"/>
-                </a:lnTo>
-                <a:lnTo>
-                  <a:pt x="3774643" y="914"/>
-                </a:lnTo>
-                <a:lnTo>
-                  <a:pt x="3813962" y="914"/>
-                </a:lnTo>
-                <a:lnTo>
-                  <a:pt x="3853282" y="914"/>
-                </a:lnTo>
-                <a:lnTo>
-                  <a:pt x="3892601" y="914"/>
-                </a:lnTo>
-                <a:lnTo>
-                  <a:pt x="3931920" y="0"/>
-                </a:lnTo>
-                <a:lnTo>
-                  <a:pt x="3971239" y="0"/>
-                </a:lnTo>
-                <a:lnTo>
-                  <a:pt x="4010558" y="0"/>
-                </a:lnTo>
-                <a:lnTo>
-                  <a:pt x="4049878" y="0"/>
-                </a:lnTo>
-                <a:lnTo>
-                  <a:pt x="4089197" y="0"/>
-                </a:lnTo>
-                <a:lnTo>
-                  <a:pt x="4128516" y="0"/>
-                </a:lnTo>
-                <a:lnTo>
-                  <a:pt x="4167835" y="0"/>
-                </a:lnTo>
-                <a:lnTo>
-                  <a:pt x="4207154" y="0"/>
-                </a:lnTo>
-                <a:lnTo>
-                  <a:pt x="4246474" y="0"/>
-                </a:lnTo>
-                <a:lnTo>
-                  <a:pt x="4285793" y="0"/>
-                </a:lnTo>
-                <a:lnTo>
-                  <a:pt x="4325112" y="0"/>
-                </a:lnTo>
-                <a:lnTo>
-                  <a:pt x="4364431" y="0"/>
-                </a:lnTo>
-                <a:lnTo>
-                  <a:pt x="4403750" y="0"/>
-                </a:lnTo>
-                <a:lnTo>
-                  <a:pt x="4443070" y="0"/>
-                </a:lnTo>
-                <a:lnTo>
-                  <a:pt x="4482389" y="0"/>
-                </a:lnTo>
-                <a:lnTo>
-                  <a:pt x="4521708" y="0"/>
-                </a:lnTo>
-                <a:lnTo>
-                  <a:pt x="4561027" y="0"/>
-                </a:lnTo>
-                <a:lnTo>
-                  <a:pt x="4600346" y="0"/>
-                </a:lnTo>
-                <a:lnTo>
-                  <a:pt x="4639666" y="0"/>
-                </a:lnTo>
-                <a:lnTo>
-                  <a:pt x="4678985" y="0"/>
-                </a:lnTo>
-                <a:lnTo>
-                  <a:pt x="4718304" y="0"/>
-                </a:lnTo>
-              </a:path>
-            </a:pathLst>
-          </a:custGeom>
-          <a:noFill/>
-          <a:ln w="44450">
-            <a:solidFill>
-              <a:srgbClr val="D55E00"/>
-            </a:solidFill>
-            <a:prstDash val="solid"/>
-          </a:ln>
-        </p:spPr>
-      </p:sp>
-      <p:sp>
-        <p:nvSpPr>
-          <p:cNvPr id="19" name="Shape 17"/>
-          <p:cNvSpPr/>
-          <p:nvPr/>
-        </p:nvSpPr>
-        <p:spPr>
-          <a:xfrm>
-            <a:off x="3178284" y="4697730"/>
-            <a:ext cx="918789" cy="9144"/>
-          </a:xfrm>
-          <a:custGeom>
-            <a:avLst/>
-            <a:gdLst/>
-            <a:ahLst/>
-            <a:cxnLst/>
-            <a:rect l="l" t="t" r="r" b="b"/>
-            <a:pathLst>
-              <a:path w="918789" h="9144">
-                <a:moveTo>
-                  <a:pt x="918972" y="0"/>
+                  <a:pt x="880567" y="0"/>
                 </a:moveTo>
                 <a:lnTo>
                   <a:pt x="0" y="0"/>
@@ -11066,7 +11183,7 @@
         </p:nvSpPr>
         <p:spPr>
           <a:xfrm>
-            <a:off x="3050268" y="4597146"/>
+            <a:off x="3146338" y="4566285"/>
             <a:ext cx="182880" cy="201168"/>
           </a:xfrm>
           <a:custGeom>
@@ -11109,7 +11226,7 @@
         </p:nvSpPr>
         <p:spPr>
           <a:xfrm>
-            <a:off x="484632" y="2919679"/>
+            <a:off x="484632" y="2916936"/>
             <a:ext cx="868680" cy="420624"/>
           </a:xfrm>
           <a:prstGeom prst="rect">
@@ -11148,7 +11265,7 @@
         </p:nvSpPr>
         <p:spPr>
           <a:xfrm>
-            <a:off x="484632" y="3927348"/>
+            <a:off x="484632" y="3906317"/>
             <a:ext cx="868680" cy="420624"/>
           </a:xfrm>
           <a:prstGeom prst="rect">
@@ -11834,7 +11951,7 @@
           <a:ln/>
         </p:spPr>
         <p:txBody>
-          <a:bodyPr wrap="square" lIns="0" tIns="0" rIns="0" bIns="0" rtlCol="0" anchor="ctr"/>
+          <a:bodyPr wrap="none" lIns="0" tIns="0" rIns="0" bIns="0" rtlCol="0" anchor="ctr"/>
           <a:lstStyle/>
           <a:p>
             <a:pPr algn="ctr" indent="0" marL="0">
@@ -11877,7 +11994,7 @@
           <a:ln/>
         </p:spPr>
         <p:txBody>
-          <a:bodyPr wrap="square" lIns="0" tIns="0" rIns="0" bIns="0" rtlCol="0" anchor="ctr"/>
+          <a:bodyPr wrap="none" lIns="0" tIns="0" rIns="0" bIns="0" rtlCol="0" anchor="ctr"/>
           <a:lstStyle/>
           <a:p>
             <a:pPr algn="ctr" indent="0" marL="0">
@@ -11920,7 +12037,7 @@
           <a:ln/>
         </p:spPr>
         <p:txBody>
-          <a:bodyPr wrap="square" lIns="0" tIns="0" rIns="0" bIns="0" rtlCol="0" anchor="ctr"/>
+          <a:bodyPr wrap="none" lIns="0" tIns="0" rIns="0" bIns="0" rtlCol="0" anchor="ctr"/>
           <a:lstStyle/>
           <a:p>
             <a:pPr algn="ctr" indent="0" marL="0">
@@ -11963,7 +12080,7 @@
           <a:ln/>
         </p:spPr>
         <p:txBody>
-          <a:bodyPr wrap="square" lIns="0" tIns="0" rIns="0" bIns="0" rtlCol="0" anchor="ctr"/>
+          <a:bodyPr wrap="none" lIns="0" tIns="0" rIns="0" bIns="0" rtlCol="0" anchor="ctr"/>
           <a:lstStyle/>
           <a:p>
             <a:pPr algn="ctr" indent="0" marL="0">
@@ -12006,7 +12123,7 @@
           <a:ln/>
         </p:spPr>
         <p:txBody>
-          <a:bodyPr wrap="square" lIns="0" tIns="0" rIns="0" bIns="0" rtlCol="0" anchor="ctr"/>
+          <a:bodyPr wrap="none" lIns="0" tIns="0" rIns="0" bIns="0" rtlCol="0" anchor="ctr"/>
           <a:lstStyle/>
           <a:p>
             <a:pPr algn="ctr" indent="0" marL="0">
@@ -12099,7 +12216,7 @@
                 <a:ea typeface="メイリオ" pitchFamily="34" charset="-122"/>
                 <a:cs typeface="メイリオ" pitchFamily="34" charset="-120"/>
               </a:rPr>
-              <a:t>日本麻酔科学会「麻酔薬および麻酔関連薬使用ガイドライン 第4版」（2025） / Panhuizen IF,</a:t>
+              <a:t>日本麻酔科学会「麻酔薬および麻酔関連薬使用ガイドライン 第4版」（2025）</a:t>
             </a:r>
             <a:endParaRPr lang="ja-JP" sz="1600" dirty="0"/>
           </a:p>
@@ -12116,7 +12233,7 @@
                 <a:ea typeface="メイリオ" pitchFamily="34" charset="-122"/>
                 <a:cs typeface="メイリオ" pitchFamily="34" charset="-120"/>
               </a:rPr>
-              <a:t>et al. Br J Anaesth 2015;114:777-784 / Morse JD, et al. J Clin Med 2022;11:3009</a:t>
+              <a:t>Panhuizen et al. Br J Anaesth 2015;114:777-784 / Morse et al. J Clin Med 2022;11:3009</a:t>
             </a:r>
             <a:endParaRPr lang="ja-JP" sz="1600" dirty="0"/>
           </a:p>
@@ -12155,7 +12272,7 @@
                     <a:bodyPr/>
                     <a:lstStyle/>
                     <a:p>
-                      <a:pPr algn="ctr" indent="0" marL="0">
+                      <a:pPr algn="l" indent="0" marL="0">
                         <a:buNone/>
                       </a:pPr>
                       <a:r>
@@ -12223,7 +12340,7 @@
                     <a:bodyPr/>
                     <a:lstStyle/>
                     <a:p>
-                      <a:pPr algn="ctr" indent="0" marL="0">
+                      <a:pPr algn="l" indent="0" marL="0">
                         <a:buNone/>
                       </a:pPr>
                       <a:r>
@@ -12291,7 +12408,7 @@
                     <a:bodyPr/>
                     <a:lstStyle/>
                     <a:p>
-                      <a:pPr algn="ctr" indent="0" marL="0">
+                      <a:pPr algn="l" indent="0" marL="0">
                         <a:buNone/>
                       </a:pPr>
                       <a:r>
@@ -13722,7 +13839,7 @@
           <a:ln/>
         </p:spPr>
         <p:txBody>
-          <a:bodyPr wrap="square" lIns="0" tIns="0" rIns="0" bIns="0" rtlCol="0" anchor="ctr"/>
+          <a:bodyPr wrap="none" lIns="0" tIns="0" rIns="0" bIns="0" rtlCol="0" anchor="ctr"/>
           <a:lstStyle/>
           <a:p>
             <a:pPr algn="ctr" indent="0" marL="0">
@@ -13765,7 +13882,7 @@
           <a:ln/>
         </p:spPr>
         <p:txBody>
-          <a:bodyPr wrap="square" lIns="0" tIns="0" rIns="0" bIns="0" rtlCol="0" anchor="ctr"/>
+          <a:bodyPr wrap="none" lIns="0" tIns="0" rIns="0" bIns="0" rtlCol="0" anchor="ctr"/>
           <a:lstStyle/>
           <a:p>
             <a:pPr algn="ctr" indent="0" marL="0">
@@ -13808,7 +13925,7 @@
           <a:ln/>
         </p:spPr>
         <p:txBody>
-          <a:bodyPr wrap="square" lIns="0" tIns="0" rIns="0" bIns="0" rtlCol="0" anchor="ctr"/>
+          <a:bodyPr wrap="none" lIns="0" tIns="0" rIns="0" bIns="0" rtlCol="0" anchor="ctr"/>
           <a:lstStyle/>
           <a:p>
             <a:pPr algn="ctr" indent="0" marL="0">
@@ -13851,7 +13968,7 @@
           <a:ln/>
         </p:spPr>
         <p:txBody>
-          <a:bodyPr wrap="square" lIns="0" tIns="0" rIns="0" bIns="0" rtlCol="0" anchor="ctr"/>
+          <a:bodyPr wrap="none" lIns="0" tIns="0" rIns="0" bIns="0" rtlCol="0" anchor="ctr"/>
           <a:lstStyle/>
           <a:p>
             <a:pPr algn="ctr" indent="0" marL="0">
@@ -13894,7 +14011,7 @@
           <a:ln/>
         </p:spPr>
         <p:txBody>
-          <a:bodyPr wrap="square" lIns="0" tIns="0" rIns="0" bIns="0" rtlCol="0" anchor="ctr"/>
+          <a:bodyPr wrap="none" lIns="0" tIns="0" rIns="0" bIns="0" rtlCol="0" anchor="ctr"/>
           <a:lstStyle/>
           <a:p>
             <a:pPr algn="ctr" indent="0" marL="0">
@@ -13987,7 +14104,7 @@
                 <a:ea typeface="メイリオ" pitchFamily="34" charset="-122"/>
                 <a:cs typeface="メイリオ" pitchFamily="34" charset="-120"/>
               </a:rPr>
-              <a:t>日本麻酔科学会「麻酔薬および麻酔関連薬使用ガイドライン 第4版」(2025) / Horrow JC, et al. BMC</a:t>
+              <a:t>日本麻酔科学会「麻酔薬および麻酔関連薬使用ガイドライン 第4版」（2025） / 各薬剤の添付文書</a:t>
             </a:r>
             <a:endParaRPr lang="ja-JP" sz="1600" dirty="0"/>
           </a:p>
@@ -14004,7 +14121,7 @@
                 <a:ea typeface="メイリオ" pitchFamily="34" charset="-122"/>
                 <a:cs typeface="メイリオ" pitchFamily="34" charset="-120"/>
               </a:rPr>
-              <a:t>Anesthesiol 2021;21:62 / Ingrande J, et al. Anesth Analg 2011;113:57-62 / 各薬剤の添付文書</a:t>
+              <a:t>Horrow et al. BMC Anesthesiol 2021;21:62 / Ingrande et al. Anesth Analg 2011;113:57-62</a:t>
             </a:r>
             <a:endParaRPr lang="ja-JP" sz="1600" dirty="0"/>
           </a:p>
@@ -14042,7 +14159,7 @@
                     <a:bodyPr/>
                     <a:lstStyle/>
                     <a:p>
-                      <a:pPr algn="ctr" indent="0" marL="0">
+                      <a:pPr algn="l" indent="0" marL="0">
                         <a:buNone/>
                       </a:pPr>
                       <a:r>
@@ -14110,7 +14227,7 @@
                     <a:bodyPr/>
                     <a:lstStyle/>
                     <a:p>
-                      <a:pPr algn="ctr" indent="0" marL="0">
+                      <a:pPr algn="l" indent="0" marL="0">
                         <a:buNone/>
                       </a:pPr>
                       <a:r>
@@ -14888,7 +15005,7 @@
           <a:ln/>
         </p:spPr>
         <p:txBody>
-          <a:bodyPr wrap="square" lIns="0" tIns="0" rIns="0" bIns="0" rtlCol="0" anchor="ctr"/>
+          <a:bodyPr wrap="none" lIns="0" tIns="0" rIns="0" bIns="0" rtlCol="0" anchor="ctr"/>
           <a:lstStyle/>
           <a:p>
             <a:pPr algn="ctr" indent="0" marL="0">
@@ -14931,7 +15048,7 @@
           <a:ln/>
         </p:spPr>
         <p:txBody>
-          <a:bodyPr wrap="square" lIns="0" tIns="0" rIns="0" bIns="0" rtlCol="0" anchor="ctr"/>
+          <a:bodyPr wrap="none" lIns="0" tIns="0" rIns="0" bIns="0" rtlCol="0" anchor="ctr"/>
           <a:lstStyle/>
           <a:p>
             <a:pPr algn="ctr" indent="0" marL="0">
@@ -14974,7 +15091,7 @@
           <a:ln/>
         </p:spPr>
         <p:txBody>
-          <a:bodyPr wrap="square" lIns="0" tIns="0" rIns="0" bIns="0" rtlCol="0" anchor="ctr"/>
+          <a:bodyPr wrap="none" lIns="0" tIns="0" rIns="0" bIns="0" rtlCol="0" anchor="ctr"/>
           <a:lstStyle/>
           <a:p>
             <a:pPr algn="ctr" indent="0" marL="0">
@@ -15017,7 +15134,7 @@
           <a:ln/>
         </p:spPr>
         <p:txBody>
-          <a:bodyPr wrap="square" lIns="0" tIns="0" rIns="0" bIns="0" rtlCol="0" anchor="ctr"/>
+          <a:bodyPr wrap="none" lIns="0" tIns="0" rIns="0" bIns="0" rtlCol="0" anchor="ctr"/>
           <a:lstStyle/>
           <a:p>
             <a:pPr algn="ctr" indent="0" marL="0">
@@ -15060,7 +15177,7 @@
           <a:ln/>
         </p:spPr>
         <p:txBody>
-          <a:bodyPr wrap="square" lIns="0" tIns="0" rIns="0" bIns="0" rtlCol="0" anchor="ctr"/>
+          <a:bodyPr wrap="none" lIns="0" tIns="0" rIns="0" bIns="0" rtlCol="0" anchor="ctr"/>
           <a:lstStyle/>
           <a:p>
             <a:pPr algn="ctr" indent="0" marL="0">
@@ -15213,7 +15330,29 @@
                 <a:ea typeface="メイリオ" pitchFamily="34" charset="-122"/>
                 <a:cs typeface="メイリオ" pitchFamily="34" charset="-120"/>
               </a:rPr>
-              <a:t>入れたら、効果のピークまで待つ</a:t>
+              <a:t>入れたら、効果の</a:t>
+            </a:r>
+            <a:r>
+              <a:rPr lang="ja-JP" altLang="en-US" sz="2800" b="1" dirty="0">
+                <a:solidFill>
+                  <a:srgbClr val="D55E00"/>
+                </a:solidFill>
+                <a:latin typeface="メイリオ" pitchFamily="34" charset="0"/>
+                <a:ea typeface="メイリオ" pitchFamily="34" charset="-122"/>
+                <a:cs typeface="メイリオ" pitchFamily="34" charset="-120"/>
+              </a:rPr>
+              <a:t>ピーク</a:t>
+            </a:r>
+            <a:r>
+              <a:rPr lang="ja-JP" altLang="en-US" sz="2800" dirty="0">
+                <a:solidFill>
+                  <a:srgbClr val="262626"/>
+                </a:solidFill>
+                <a:latin typeface="メイリオ" pitchFamily="34" charset="0"/>
+                <a:ea typeface="メイリオ" pitchFamily="34" charset="-122"/>
+                <a:cs typeface="メイリオ" pitchFamily="34" charset="-120"/>
+              </a:rPr>
+              <a:t>まで待つ</a:t>
             </a:r>
             <a:endParaRPr lang="ja-JP" sz="2800" dirty="0"/>
           </a:p>
@@ -15234,7 +15373,29 @@
                 <a:ea typeface="メイリオ" pitchFamily="34" charset="-122"/>
                 <a:cs typeface="メイリオ" pitchFamily="34" charset="-120"/>
               </a:rPr>
-              <a:t>反応を見て、少量ずつ追加する</a:t>
+              <a:t>反応を見て、</a:t>
+            </a:r>
+            <a:r>
+              <a:rPr lang="ja-JP" altLang="en-US" sz="2800" b="1" dirty="0">
+                <a:solidFill>
+                  <a:srgbClr val="D55E00"/>
+                </a:solidFill>
+                <a:latin typeface="メイリオ" pitchFamily="34" charset="0"/>
+                <a:ea typeface="メイリオ" pitchFamily="34" charset="-122"/>
+                <a:cs typeface="メイリオ" pitchFamily="34" charset="-120"/>
+              </a:rPr>
+              <a:t>少量ずつ</a:t>
+            </a:r>
+            <a:r>
+              <a:rPr lang="ja-JP" altLang="en-US" sz="2800" dirty="0">
+                <a:solidFill>
+                  <a:srgbClr val="262626"/>
+                </a:solidFill>
+                <a:latin typeface="メイリオ" pitchFamily="34" charset="0"/>
+                <a:ea typeface="メイリオ" pitchFamily="34" charset="-122"/>
+                <a:cs typeface="メイリオ" pitchFamily="34" charset="-120"/>
+              </a:rPr>
+              <a:t>追加する</a:t>
             </a:r>
             <a:endParaRPr lang="ja-JP" sz="2800" dirty="0"/>
           </a:p>
@@ -15255,7 +15416,29 @@
                 <a:ea typeface="メイリオ" pitchFamily="34" charset="-122"/>
                 <a:cs typeface="メイリオ" pitchFamily="34" charset="-120"/>
               </a:rPr>
-              <a:t>持続投与は、切れ方を考えて止める時刻を決める</a:t>
+              <a:t>持続投与は、切れ方を考えて</a:t>
+            </a:r>
+            <a:r>
+              <a:rPr lang="ja-JP" altLang="en-US" sz="2800" b="1" dirty="0">
+                <a:solidFill>
+                  <a:srgbClr val="D55E00"/>
+                </a:solidFill>
+                <a:latin typeface="メイリオ" pitchFamily="34" charset="0"/>
+                <a:ea typeface="メイリオ" pitchFamily="34" charset="-122"/>
+                <a:cs typeface="メイリオ" pitchFamily="34" charset="-120"/>
+              </a:rPr>
+              <a:t>止める時刻</a:t>
+            </a:r>
+            <a:r>
+              <a:rPr lang="ja-JP" altLang="en-US" sz="2800" dirty="0">
+                <a:solidFill>
+                  <a:srgbClr val="262626"/>
+                </a:solidFill>
+                <a:latin typeface="メイリオ" pitchFamily="34" charset="0"/>
+                <a:ea typeface="メイリオ" pitchFamily="34" charset="-122"/>
+                <a:cs typeface="メイリオ" pitchFamily="34" charset="-120"/>
+              </a:rPr>
+              <a:t>を決める</a:t>
             </a:r>
             <a:endParaRPr lang="ja-JP" sz="2800" dirty="0"/>
           </a:p>
@@ -15276,7 +15459,29 @@
                 <a:ea typeface="メイリオ" pitchFamily="34" charset="-122"/>
                 <a:cs typeface="メイリオ" pitchFamily="34" charset="-120"/>
               </a:rPr>
-              <a:t>高齢者・循環不全は、減らして（目安 半量）ゆっくり</a:t>
+              <a:t>高齢者・循環不全は、減らして（目安 </a:t>
+            </a:r>
+            <a:r>
+              <a:rPr lang="ja-JP" altLang="en-US" sz="2800" b="1" dirty="0">
+                <a:solidFill>
+                  <a:srgbClr val="D55E00"/>
+                </a:solidFill>
+                <a:latin typeface="メイリオ" pitchFamily="34" charset="0"/>
+                <a:ea typeface="メイリオ" pitchFamily="34" charset="-122"/>
+                <a:cs typeface="メイリオ" pitchFamily="34" charset="-120"/>
+              </a:rPr>
+              <a:t>半量</a:t>
+            </a:r>
+            <a:r>
+              <a:rPr lang="ja-JP" altLang="en-US" sz="2800" dirty="0">
+                <a:solidFill>
+                  <a:srgbClr val="262626"/>
+                </a:solidFill>
+                <a:latin typeface="メイリオ" pitchFamily="34" charset="0"/>
+                <a:ea typeface="メイリオ" pitchFamily="34" charset="-122"/>
+                <a:cs typeface="メイリオ" pitchFamily="34" charset="-120"/>
+              </a:rPr>
+              <a:t>）ゆっくり</a:t>
             </a:r>
             <a:endParaRPr lang="ja-JP" sz="2800" dirty="0"/>
           </a:p>
@@ -15297,7 +15502,18 @@
                 <a:ea typeface="メイリオ" pitchFamily="34" charset="-122"/>
                 <a:cs typeface="メイリオ" pitchFamily="34" charset="-120"/>
               </a:rPr>
-              <a:t>併用するなら、それぞれの量を減らす</a:t>
+              <a:t>併用するなら、それぞれの量を</a:t>
+            </a:r>
+            <a:r>
+              <a:rPr lang="ja-JP" altLang="en-US" sz="2800" b="1" dirty="0">
+                <a:solidFill>
+                  <a:srgbClr val="D55E00"/>
+                </a:solidFill>
+                <a:latin typeface="メイリオ" pitchFamily="34" charset="0"/>
+                <a:ea typeface="メイリオ" pitchFamily="34" charset="-122"/>
+                <a:cs typeface="メイリオ" pitchFamily="34" charset="-120"/>
+              </a:rPr>
+              <a:t>減らす</a:t>
             </a:r>
             <a:endParaRPr lang="ja-JP" sz="2800" dirty="0"/>
           </a:p>
